--- a/docs/slides/Three-Layer_Collaboration_EN.pptx
+++ b/docs/slides/Three-Layer_Collaboration_EN.pptx
@@ -527,7 +527,7 @@
           <a:p>
             <a:r>
               <a:rPr lang="en-US" dirty="0"/>
-              <a:t/>
+              <a:t>Frame it: three agents collaborate, and I delegate autonomy down a three-layer chain.</a:t>
             </a:r>
             <a:endParaRPr lang="en-US" dirty="0"/>
           </a:p>
@@ -615,7 +615,7 @@
           <a:p>
             <a:r>
               <a:rPr lang="en-US" dirty="0"/>
-              <a:t/>
+              <a:t>My job is the steering wheel and the brake: direction, irreversible calls, questions, gatekeeping.</a:t>
             </a:r>
             <a:endParaRPr lang="en-US" dirty="0"/>
           </a:p>
@@ -703,7 +703,7 @@
           <a:p>
             <a:r>
               <a:rPr lang="en-US" dirty="0"/>
-              <a:t/>
+              <a:t>Claude implements, verifies by reading the source, analyzes data, and reports honestly.</a:t>
             </a:r>
             <a:endParaRPr lang="en-US" dirty="0"/>
           </a:p>
@@ -791,7 +791,7 @@
           <a:p>
             <a:r>
               <a:rPr lang="en-US" dirty="0"/>
-              <a:t/>
+              <a:t>OpenEvolve mutates autonomously inside the frame — it evolved the rating formula nobody wrote.</a:t>
             </a:r>
             <a:endParaRPr lang="en-US" dirty="0"/>
           </a:p>
@@ -879,7 +879,7 @@
           <a:p>
             <a:r>
               <a:rPr lang="en-US" dirty="0"/>
-              <a:t/>
+              <a:t>None of the three is optional; remove my layer and there's no direction.</a:t>
             </a:r>
             <a:endParaRPr lang="en-US" dirty="0"/>
           </a:p>
@@ -967,7 +967,7 @@
           <a:p>
             <a:r>
               <a:rPr lang="en-US" dirty="0"/>
-              <a:t/>
+              <a:t>A good question beats a good answer — my open question forced the failure taxonomy.</a:t>
             </a:r>
             <a:endParaRPr lang="en-US" dirty="0"/>
           </a:p>
@@ -1055,7 +1055,7 @@
           <a:p>
             <a:r>
               <a:rPr lang="en-US" dirty="0"/>
-              <a:t/>
+              <a:t>Honest reporting caught the bug: a 0.84 score hid that the tools never actually attached.</a:t>
             </a:r>
             <a:endParaRPr lang="en-US" dirty="0"/>
           </a:p>
@@ -1143,7 +1143,7 @@
           <a:p>
             <a:r>
               <a:rPr lang="en-US" dirty="0"/>
-              <a:t/>
+              <a:t>I gatekeep irreversible actions — Claude asks before merging, installing, or changing the system.</a:t>
             </a:r>
             <a:endParaRPr lang="en-US" dirty="0"/>
           </a:p>
@@ -1231,7 +1231,7 @@
           <a:p>
             <a:r>
               <a:rPr lang="en-US" dirty="0"/>
-              <a:t/>
+              <a:t>Knowledge is complementary: my environment sense plus Claude's tooling detail got the run finished.</a:t>
             </a:r>
             <a:endParaRPr lang="en-US" dirty="0"/>
           </a:p>
@@ -1319,7 +1319,7 @@
           <a:p>
             <a:r>
               <a:rPr lang="en-US" dirty="0"/>
-              <a:t/>
+              <a:t>The core pattern: build guardrails first, then delegate — 36% crashes became zero.</a:t>
             </a:r>
             <a:endParaRPr lang="en-US" dirty="0"/>
           </a:p>
@@ -1407,7 +1407,7 @@
           <a:p>
             <a:r>
               <a:rPr lang="en-US" dirty="0"/>
-              <a:t/>
+              <a:t>Recap the five patterns and ask which one they could use tomorrow.</a:t>
             </a:r>
             <a:endParaRPr lang="en-US" dirty="0"/>
           </a:p>
@@ -1495,7 +1495,7 @@
           <a:p>
             <a:r>
               <a:rPr lang="en-US" dirty="0"/>
-              <a:t/>
+              <a:t>Pose the opening question: is your AI a tool, or a partner that makes its own decisions?</a:t>
             </a:r>
             <a:endParaRPr lang="en-US" dirty="0"/>
           </a:p>
@@ -1583,7 +1583,7 @@
           <a:p>
             <a:r>
               <a:rPr lang="en-US" dirty="0"/>
-              <a:t/>
+              <a:t>All three layers contributed to iter22 — my decision, Claude's frame, OpenEvolve's formula.</a:t>
             </a:r>
             <a:endParaRPr lang="en-US" dirty="0"/>
           </a:p>
@@ -1671,7 +1671,7 @@
           <a:p>
             <a:r>
               <a:rPr lang="en-US" dirty="0"/>
-              <a:t/>
+              <a:t>No single layer could have produced iter22 — it's an emergent product of the collaboration.</a:t>
             </a:r>
             <a:endParaRPr lang="en-US" dirty="0"/>
           </a:p>
@@ -1759,7 +1759,7 @@
           <a:p>
             <a:r>
               <a:rPr lang="en-US" dirty="0"/>
-              <a:t/>
+              <a:t>After iter22 came over-engineering, sub-metric trade-offs, and island convergence — a local optimum.</a:t>
             </a:r>
             <a:endParaRPr lang="en-US" dirty="0"/>
           </a:p>
@@ -1847,7 +1847,7 @@
           <a:p>
             <a:r>
               <a:rPr lang="en-US" dirty="0"/>
-              <a:t/>
+              <a:t>Even the eight crashes became insight: five broken YAML, three rate limits — failure understood together.</a:t>
             </a:r>
             <a:endParaRPr lang="en-US" dirty="0"/>
           </a:p>
@@ -1935,7 +1935,7 @@
           <a:p>
             <a:r>
               <a:rPr lang="en-US" dirty="0"/>
-              <a:t/>
+              <a:t>A rubric: I take direction and irreversibles, Claude takes implementation, evolution takes bounded exploration.</a:t>
             </a:r>
             <a:endParaRPr lang="en-US" dirty="0"/>
           </a:p>
@@ -2023,7 +2023,7 @@
           <a:p>
             <a:r>
               <a:rPr lang="en-US" dirty="0"/>
-              <a:t/>
+              <a:t>Delegating autonomy is a new skill; honesty plus human gatekeeping is the safety bedrock.</a:t>
             </a:r>
             <a:endParaRPr lang="en-US" dirty="0"/>
           </a:p>
@@ -2111,7 +2111,7 @@
           <a:p>
             <a:r>
               <a:rPr lang="en-US" dirty="0"/>
-              <a:t/>
+              <a:t>The real product is a reusable human-plus-AI-plus-evolution workflow, not just a 0.84 agent.</a:t>
             </a:r>
             <a:endParaRPr lang="en-US" dirty="0"/>
           </a:p>
@@ -2199,7 +2199,7 @@
           <a:p>
             <a:r>
               <a:rPr lang="en-US" dirty="0"/>
-              <a:t/>
+              <a:t>Six parts: architecture, roles, five patterns, the iter22 climax, reflection, and closing.</a:t>
             </a:r>
             <a:endParaRPr lang="en-US" dirty="0"/>
           </a:p>
@@ -2287,7 +2287,7 @@
           <a:p>
             <a:r>
               <a:rPr lang="en-US" dirty="0"/>
-              <a:t/>
+              <a:t>Introduce the three players — me, Claude, and OpenEvolve — two of them AI but in very different roles.</a:t>
             </a:r>
             <a:endParaRPr lang="en-US" dirty="0"/>
           </a:p>
@@ -2375,7 +2375,7 @@
           <a:p>
             <a:r>
               <a:rPr lang="en-US" dirty="0"/>
-              <a:t/>
+              <a:t>Autonomy rises as you go inward, and so must the guardrails — this is delegation, not tool use.</a:t>
             </a:r>
             <a:endParaRPr lang="en-US" dirty="0"/>
           </a:p>
@@ -2463,7 +2463,7 @@
           <a:p>
             <a:r>
               <a:rPr lang="en-US" dirty="0"/>
-              <a:t/>
+              <a:t>Claude is the intentional architect; OpenEvolve the intentionless prospector — different species, complementary.</a:t>
             </a:r>
             <a:endParaRPr lang="en-US" dirty="0"/>
           </a:p>
@@ -2551,7 +2551,7 @@
           <a:p>
             <a:r>
               <a:rPr lang="en-US" dirty="0"/>
-              <a:t/>
+              <a:t>Each layer's autonomy is matched by a guardrail; the more I let go, the stronger the guardrail.</a:t>
             </a:r>
             <a:endParaRPr lang="en-US" dirty="0"/>
           </a:p>
@@ -2639,7 +2639,7 @@
           <a:p>
             <a:r>
               <a:rPr lang="en-US" dirty="0"/>
-              <a:t/>
+              <a:t>Every PR and experiment runs the same loop: my intent, Claude builds, verify, honest report, I decide.</a:t>
             </a:r>
             <a:endParaRPr lang="en-US" dirty="0"/>
           </a:p>
@@ -2727,7 +2727,7 @@
           <a:p>
             <a:r>
               <a:rPr lang="en-US" dirty="0"/>
-              <a:t/>
+              <a:t>AI increasingly uses other AIs, so collaboration is multi-layer — the question is how to delegate safely.</a:t>
             </a:r>
             <a:endParaRPr lang="en-US" dirty="0"/>
           </a:p>
@@ -3102,7 +3102,7 @@
       </p:grpSpPr>
       <p:sp>
         <p:nvSpPr>
-          <p:cNvPr id="2" name="Shape 0"/>
+          <p:cNvPr id="3" name="Shape 0"/>
           <p:cNvSpPr/>
           <p:nvPr/>
         </p:nvSpPr>
@@ -3122,7 +3122,7 @@
       </p:sp>
       <p:sp>
         <p:nvSpPr>
-          <p:cNvPr id="3" name="Text 1"/>
+          <p:cNvPr id="4" name="Text 1"/>
           <p:cNvSpPr/>
           <p:nvPr/>
         </p:nvSpPr>
@@ -3161,7 +3161,7 @@
       </p:sp>
       <p:sp>
         <p:nvSpPr>
-          <p:cNvPr id="4" name="Text 2"/>
+          <p:cNvPr id="5" name="Text 2"/>
           <p:cNvSpPr/>
           <p:nvPr/>
         </p:nvSpPr>
@@ -3200,7 +3200,7 @@
       </p:sp>
       <p:sp>
         <p:nvSpPr>
-          <p:cNvPr id="5" name="Text 3"/>
+          <p:cNvPr id="6" name="Text 3"/>
           <p:cNvSpPr/>
           <p:nvPr/>
         </p:nvSpPr>
@@ -3239,7 +3239,7 @@
       </p:sp>
       <p:sp>
         <p:nvSpPr>
-          <p:cNvPr id="6" name="Shape 4"/>
+          <p:cNvPr id="7" name="Shape 4"/>
           <p:cNvSpPr/>
           <p:nvPr/>
         </p:nvSpPr>
@@ -3261,7 +3261,7 @@
       </p:sp>
       <p:sp>
         <p:nvSpPr>
-          <p:cNvPr id="7" name="Text 5"/>
+          <p:cNvPr id="8" name="Text 5"/>
           <p:cNvSpPr/>
           <p:nvPr/>
         </p:nvSpPr>
@@ -3300,7 +3300,7 @@
       </p:sp>
       <p:sp>
         <p:nvSpPr>
-          <p:cNvPr id="8" name="Text 6"/>
+          <p:cNvPr id="9" name="Text 6"/>
           <p:cNvSpPr/>
           <p:nvPr/>
         </p:nvSpPr>
@@ -3339,7 +3339,7 @@
       </p:sp>
       <p:sp>
         <p:nvSpPr>
-          <p:cNvPr id="9" name="Shape 7"/>
+          <p:cNvPr id="10" name="Shape 7"/>
           <p:cNvSpPr/>
           <p:nvPr/>
         </p:nvSpPr>
@@ -3361,7 +3361,7 @@
       </p:sp>
       <p:sp>
         <p:nvSpPr>
-          <p:cNvPr id="10" name="Text 8"/>
+          <p:cNvPr id="11" name="Text 8"/>
           <p:cNvSpPr/>
           <p:nvPr/>
         </p:nvSpPr>
@@ -3400,7 +3400,7 @@
       </p:sp>
       <p:sp>
         <p:nvSpPr>
-          <p:cNvPr id="11" name="Text 9"/>
+          <p:cNvPr id="12" name="Text 9"/>
           <p:cNvSpPr/>
           <p:nvPr/>
         </p:nvSpPr>
@@ -3439,7 +3439,7 @@
       </p:sp>
       <p:sp>
         <p:nvSpPr>
-          <p:cNvPr id="12" name="Shape 10"/>
+          <p:cNvPr id="13" name="Shape 10"/>
           <p:cNvSpPr/>
           <p:nvPr/>
         </p:nvSpPr>
@@ -3461,7 +3461,7 @@
       </p:sp>
       <p:sp>
         <p:nvSpPr>
-          <p:cNvPr id="13" name="Text 11"/>
+          <p:cNvPr id="14" name="Text 11"/>
           <p:cNvSpPr/>
           <p:nvPr/>
         </p:nvSpPr>
@@ -3500,7 +3500,7 @@
       </p:sp>
       <p:sp>
         <p:nvSpPr>
-          <p:cNvPr id="14" name="Text 12"/>
+          <p:cNvPr id="15" name="Text 12"/>
           <p:cNvSpPr/>
           <p:nvPr/>
         </p:nvSpPr>
@@ -3539,7 +3539,7 @@
       </p:sp>
       <p:sp>
         <p:nvSpPr>
-          <p:cNvPr id="15" name="Text 13"/>
+          <p:cNvPr id="16" name="Text 13"/>
           <p:cNvSpPr/>
           <p:nvPr/>
         </p:nvSpPr>
@@ -3624,7 +3624,7 @@
       </p:grpSpPr>
       <p:sp>
         <p:nvSpPr>
-          <p:cNvPr id="2" name="Shape 0"/>
+          <p:cNvPr id="3" name="Shape 0"/>
           <p:cNvSpPr/>
           <p:nvPr/>
         </p:nvSpPr>
@@ -3644,7 +3644,7 @@
       </p:sp>
       <p:sp>
         <p:nvSpPr>
-          <p:cNvPr id="3" name="Text 1"/>
+          <p:cNvPr id="4" name="Text 1"/>
           <p:cNvSpPr/>
           <p:nvPr/>
         </p:nvSpPr>
@@ -3683,7 +3683,7 @@
       </p:sp>
       <p:sp>
         <p:nvSpPr>
-          <p:cNvPr id="4" name="Text 2"/>
+          <p:cNvPr id="5" name="Text 2"/>
           <p:cNvSpPr/>
           <p:nvPr/>
         </p:nvSpPr>
@@ -3722,7 +3722,7 @@
       </p:sp>
       <p:sp>
         <p:nvSpPr>
-          <p:cNvPr id="5" name="Shape 3"/>
+          <p:cNvPr id="6" name="Shape 3"/>
           <p:cNvSpPr/>
           <p:nvPr/>
         </p:nvSpPr>
@@ -3754,7 +3754,7 @@
       </p:sp>
       <p:sp>
         <p:nvSpPr>
-          <p:cNvPr id="6" name="Shape 4"/>
+          <p:cNvPr id="7" name="Shape 4"/>
           <p:cNvSpPr/>
           <p:nvPr/>
         </p:nvSpPr>
@@ -3774,7 +3774,7 @@
       </p:sp>
       <p:sp>
         <p:nvSpPr>
-          <p:cNvPr id="7" name="Text 5"/>
+          <p:cNvPr id="8" name="Text 5"/>
           <p:cNvSpPr/>
           <p:nvPr/>
         </p:nvSpPr>
@@ -3813,7 +3813,7 @@
       </p:sp>
       <p:sp>
         <p:nvSpPr>
-          <p:cNvPr id="8" name="Text 6"/>
+          <p:cNvPr id="9" name="Text 6"/>
           <p:cNvSpPr/>
           <p:nvPr/>
         </p:nvSpPr>
@@ -3852,7 +3852,7 @@
       </p:sp>
       <p:sp>
         <p:nvSpPr>
-          <p:cNvPr id="9" name="Shape 7"/>
+          <p:cNvPr id="10" name="Shape 7"/>
           <p:cNvSpPr/>
           <p:nvPr/>
         </p:nvSpPr>
@@ -3884,7 +3884,7 @@
       </p:sp>
       <p:sp>
         <p:nvSpPr>
-          <p:cNvPr id="10" name="Shape 8"/>
+          <p:cNvPr id="11" name="Shape 8"/>
           <p:cNvSpPr/>
           <p:nvPr/>
         </p:nvSpPr>
@@ -3904,7 +3904,7 @@
       </p:sp>
       <p:sp>
         <p:nvSpPr>
-          <p:cNvPr id="11" name="Text 9"/>
+          <p:cNvPr id="12" name="Text 9"/>
           <p:cNvSpPr/>
           <p:nvPr/>
         </p:nvSpPr>
@@ -3943,7 +3943,7 @@
       </p:sp>
       <p:sp>
         <p:nvSpPr>
-          <p:cNvPr id="12" name="Text 10"/>
+          <p:cNvPr id="13" name="Text 10"/>
           <p:cNvSpPr/>
           <p:nvPr/>
         </p:nvSpPr>
@@ -3982,7 +3982,7 @@
       </p:sp>
       <p:sp>
         <p:nvSpPr>
-          <p:cNvPr id="13" name="Shape 11"/>
+          <p:cNvPr id="14" name="Shape 11"/>
           <p:cNvSpPr/>
           <p:nvPr/>
         </p:nvSpPr>
@@ -4014,7 +4014,7 @@
       </p:sp>
       <p:sp>
         <p:nvSpPr>
-          <p:cNvPr id="14" name="Shape 12"/>
+          <p:cNvPr id="15" name="Shape 12"/>
           <p:cNvSpPr/>
           <p:nvPr/>
         </p:nvSpPr>
@@ -4034,7 +4034,7 @@
       </p:sp>
       <p:sp>
         <p:nvSpPr>
-          <p:cNvPr id="15" name="Text 13"/>
+          <p:cNvPr id="16" name="Text 13"/>
           <p:cNvSpPr/>
           <p:nvPr/>
         </p:nvSpPr>
@@ -4073,7 +4073,7 @@
       </p:sp>
       <p:sp>
         <p:nvSpPr>
-          <p:cNvPr id="16" name="Text 14"/>
+          <p:cNvPr id="17" name="Text 14"/>
           <p:cNvSpPr/>
           <p:nvPr/>
         </p:nvSpPr>
@@ -4112,7 +4112,7 @@
       </p:sp>
       <p:sp>
         <p:nvSpPr>
-          <p:cNvPr id="17" name="Shape 15"/>
+          <p:cNvPr id="18" name="Shape 15"/>
           <p:cNvSpPr/>
           <p:nvPr/>
         </p:nvSpPr>
@@ -4144,7 +4144,7 @@
       </p:sp>
       <p:sp>
         <p:nvSpPr>
-          <p:cNvPr id="18" name="Shape 16"/>
+          <p:cNvPr id="19" name="Shape 16"/>
           <p:cNvSpPr/>
           <p:nvPr/>
         </p:nvSpPr>
@@ -4164,7 +4164,7 @@
       </p:sp>
       <p:sp>
         <p:nvSpPr>
-          <p:cNvPr id="19" name="Text 17"/>
+          <p:cNvPr id="20" name="Text 17"/>
           <p:cNvSpPr/>
           <p:nvPr/>
         </p:nvSpPr>
@@ -4203,7 +4203,7 @@
       </p:sp>
       <p:sp>
         <p:nvSpPr>
-          <p:cNvPr id="20" name="Text 18"/>
+          <p:cNvPr id="21" name="Text 18"/>
           <p:cNvSpPr/>
           <p:nvPr/>
         </p:nvSpPr>
@@ -4242,7 +4242,7 @@
       </p:sp>
       <p:sp>
         <p:nvSpPr>
-          <p:cNvPr id="21" name="Text 19"/>
+          <p:cNvPr id="22" name="Text 19"/>
           <p:cNvSpPr/>
           <p:nvPr/>
         </p:nvSpPr>
@@ -4281,7 +4281,7 @@
       </p:sp>
       <p:sp>
         <p:nvSpPr>
-          <p:cNvPr id="22" name="Text 20"/>
+          <p:cNvPr id="23" name="Text 20"/>
           <p:cNvSpPr/>
           <p:nvPr/>
         </p:nvSpPr>
@@ -4366,7 +4366,7 @@
       </p:grpSpPr>
       <p:sp>
         <p:nvSpPr>
-          <p:cNvPr id="2" name="Shape 0"/>
+          <p:cNvPr id="3" name="Shape 0"/>
           <p:cNvSpPr/>
           <p:nvPr/>
         </p:nvSpPr>
@@ -4386,7 +4386,7 @@
       </p:sp>
       <p:sp>
         <p:nvSpPr>
-          <p:cNvPr id="3" name="Text 1"/>
+          <p:cNvPr id="4" name="Text 1"/>
           <p:cNvSpPr/>
           <p:nvPr/>
         </p:nvSpPr>
@@ -4425,7 +4425,7 @@
       </p:sp>
       <p:sp>
         <p:nvSpPr>
-          <p:cNvPr id="4" name="Text 2"/>
+          <p:cNvPr id="5" name="Text 2"/>
           <p:cNvSpPr/>
           <p:nvPr/>
         </p:nvSpPr>
@@ -4464,7 +4464,7 @@
       </p:sp>
       <p:sp>
         <p:nvSpPr>
-          <p:cNvPr id="5" name="Shape 3"/>
+          <p:cNvPr id="6" name="Shape 3"/>
           <p:cNvSpPr/>
           <p:nvPr/>
         </p:nvSpPr>
@@ -4484,7 +4484,7 @@
       </p:sp>
       <p:sp>
         <p:nvSpPr>
-          <p:cNvPr id="6" name="Text 4"/>
+          <p:cNvPr id="7" name="Text 4"/>
           <p:cNvSpPr/>
           <p:nvPr/>
         </p:nvSpPr>
@@ -4523,7 +4523,7 @@
       </p:sp>
       <p:sp>
         <p:nvSpPr>
-          <p:cNvPr id="7" name="Shape 5"/>
+          <p:cNvPr id="8" name="Shape 5"/>
           <p:cNvSpPr/>
           <p:nvPr/>
         </p:nvSpPr>
@@ -4543,7 +4543,7 @@
       </p:sp>
       <p:sp>
         <p:nvSpPr>
-          <p:cNvPr id="8" name="Text 6"/>
+          <p:cNvPr id="9" name="Text 6"/>
           <p:cNvSpPr/>
           <p:nvPr/>
         </p:nvSpPr>
@@ -4582,7 +4582,7 @@
       </p:sp>
       <p:sp>
         <p:nvSpPr>
-          <p:cNvPr id="9" name="Shape 7"/>
+          <p:cNvPr id="10" name="Shape 7"/>
           <p:cNvSpPr/>
           <p:nvPr/>
         </p:nvSpPr>
@@ -4602,7 +4602,7 @@
       </p:sp>
       <p:sp>
         <p:nvSpPr>
-          <p:cNvPr id="10" name="Text 8"/>
+          <p:cNvPr id="11" name="Text 8"/>
           <p:cNvSpPr/>
           <p:nvPr/>
         </p:nvSpPr>
@@ -4641,7 +4641,7 @@
       </p:sp>
       <p:sp>
         <p:nvSpPr>
-          <p:cNvPr id="11" name="Shape 9"/>
+          <p:cNvPr id="12" name="Shape 9"/>
           <p:cNvSpPr/>
           <p:nvPr/>
         </p:nvSpPr>
@@ -4661,7 +4661,7 @@
       </p:sp>
       <p:sp>
         <p:nvSpPr>
-          <p:cNvPr id="12" name="Text 10"/>
+          <p:cNvPr id="13" name="Text 10"/>
           <p:cNvSpPr/>
           <p:nvPr/>
         </p:nvSpPr>
@@ -4700,7 +4700,7 @@
       </p:sp>
       <p:sp>
         <p:nvSpPr>
-          <p:cNvPr id="13" name="Shape 11"/>
+          <p:cNvPr id="14" name="Shape 11"/>
           <p:cNvSpPr/>
           <p:nvPr/>
         </p:nvSpPr>
@@ -4720,7 +4720,7 @@
       </p:sp>
       <p:sp>
         <p:nvSpPr>
-          <p:cNvPr id="14" name="Text 12"/>
+          <p:cNvPr id="15" name="Text 12"/>
           <p:cNvSpPr/>
           <p:nvPr/>
         </p:nvSpPr>
@@ -4759,7 +4759,7 @@
       </p:sp>
       <p:sp>
         <p:nvSpPr>
-          <p:cNvPr id="15" name="Shape 13"/>
+          <p:cNvPr id="16" name="Shape 13"/>
           <p:cNvSpPr/>
           <p:nvPr/>
         </p:nvSpPr>
@@ -4791,7 +4791,7 @@
       </p:sp>
       <p:sp>
         <p:nvSpPr>
-          <p:cNvPr id="16" name="Text 14"/>
+          <p:cNvPr id="17" name="Text 14"/>
           <p:cNvSpPr/>
           <p:nvPr/>
         </p:nvSpPr>
@@ -4830,7 +4830,7 @@
       </p:sp>
       <p:sp>
         <p:nvSpPr>
-          <p:cNvPr id="17" name="Text 15"/>
+          <p:cNvPr id="18" name="Text 15"/>
           <p:cNvSpPr/>
           <p:nvPr/>
         </p:nvSpPr>
@@ -4915,7 +4915,7 @@
       </p:grpSpPr>
       <p:sp>
         <p:nvSpPr>
-          <p:cNvPr id="2" name="Shape 0"/>
+          <p:cNvPr id="3" name="Shape 0"/>
           <p:cNvSpPr/>
           <p:nvPr/>
         </p:nvSpPr>
@@ -4935,7 +4935,7 @@
       </p:sp>
       <p:sp>
         <p:nvSpPr>
-          <p:cNvPr id="3" name="Text 1"/>
+          <p:cNvPr id="4" name="Text 1"/>
           <p:cNvSpPr/>
           <p:nvPr/>
         </p:nvSpPr>
@@ -4974,7 +4974,7 @@
       </p:sp>
       <p:sp>
         <p:nvSpPr>
-          <p:cNvPr id="4" name="Text 2"/>
+          <p:cNvPr id="5" name="Text 2"/>
           <p:cNvSpPr/>
           <p:nvPr/>
         </p:nvSpPr>
@@ -5013,7 +5013,7 @@
       </p:sp>
       <p:sp>
         <p:nvSpPr>
-          <p:cNvPr id="5" name="Text 3"/>
+          <p:cNvPr id="6" name="Text 3"/>
           <p:cNvSpPr/>
           <p:nvPr/>
         </p:nvSpPr>
@@ -5080,7 +5080,7 @@
       </p:sp>
       <p:sp>
         <p:nvSpPr>
-          <p:cNvPr id="6" name="Shape 4"/>
+          <p:cNvPr id="7" name="Shape 4"/>
           <p:cNvSpPr/>
           <p:nvPr/>
         </p:nvSpPr>
@@ -5112,7 +5112,7 @@
       </p:sp>
       <p:sp>
         <p:nvSpPr>
-          <p:cNvPr id="7" name="Shape 5"/>
+          <p:cNvPr id="8" name="Shape 5"/>
           <p:cNvSpPr/>
           <p:nvPr/>
         </p:nvSpPr>
@@ -5132,7 +5132,7 @@
       </p:sp>
       <p:sp>
         <p:nvSpPr>
-          <p:cNvPr id="8" name="Text 6"/>
+          <p:cNvPr id="9" name="Text 6"/>
           <p:cNvSpPr/>
           <p:nvPr/>
         </p:nvSpPr>
@@ -5171,7 +5171,7 @@
       </p:sp>
       <p:sp>
         <p:nvSpPr>
-          <p:cNvPr id="9" name="Text 7"/>
+          <p:cNvPr id="10" name="Text 7"/>
           <p:cNvSpPr/>
           <p:nvPr/>
         </p:nvSpPr>
@@ -5213,7 +5213,7 @@
       </p:sp>
       <p:sp>
         <p:nvSpPr>
-          <p:cNvPr id="10" name="Text 8"/>
+          <p:cNvPr id="11" name="Text 8"/>
           <p:cNvSpPr/>
           <p:nvPr/>
         </p:nvSpPr>
@@ -5252,7 +5252,7 @@
       </p:sp>
       <p:sp>
         <p:nvSpPr>
-          <p:cNvPr id="11" name="Text 9"/>
+          <p:cNvPr id="12" name="Text 9"/>
           <p:cNvSpPr/>
           <p:nvPr/>
         </p:nvSpPr>
@@ -5407,7 +5407,7 @@
       </p:grpSpPr>
       <p:sp>
         <p:nvSpPr>
-          <p:cNvPr id="2" name="Shape 0"/>
+          <p:cNvPr id="3" name="Shape 0"/>
           <p:cNvSpPr/>
           <p:nvPr/>
         </p:nvSpPr>
@@ -5427,7 +5427,7 @@
       </p:sp>
       <p:sp>
         <p:nvSpPr>
-          <p:cNvPr id="3" name="Text 1"/>
+          <p:cNvPr id="4" name="Text 1"/>
           <p:cNvSpPr/>
           <p:nvPr/>
         </p:nvSpPr>
@@ -5466,7 +5466,7 @@
       </p:sp>
       <p:sp>
         <p:nvSpPr>
-          <p:cNvPr id="4" name="Text 2"/>
+          <p:cNvPr id="5" name="Text 2"/>
           <p:cNvSpPr/>
           <p:nvPr/>
         </p:nvSpPr>
@@ -5505,7 +5505,7 @@
       </p:sp>
       <p:sp>
         <p:nvSpPr>
-          <p:cNvPr id="5" name="Shape 3"/>
+          <p:cNvPr id="6" name="Shape 3"/>
           <p:cNvSpPr/>
           <p:nvPr/>
         </p:nvSpPr>
@@ -5537,7 +5537,7 @@
       </p:sp>
       <p:sp>
         <p:nvSpPr>
-          <p:cNvPr id="6" name="Shape 4"/>
+          <p:cNvPr id="7" name="Shape 4"/>
           <p:cNvSpPr/>
           <p:nvPr/>
         </p:nvSpPr>
@@ -5557,7 +5557,7 @@
       </p:sp>
       <p:sp>
         <p:nvSpPr>
-          <p:cNvPr id="7" name="Text 5"/>
+          <p:cNvPr id="8" name="Text 5"/>
           <p:cNvSpPr/>
           <p:nvPr/>
         </p:nvSpPr>
@@ -5596,7 +5596,7 @@
       </p:sp>
       <p:sp>
         <p:nvSpPr>
-          <p:cNvPr id="8" name="Text 6"/>
+          <p:cNvPr id="9" name="Text 6"/>
           <p:cNvSpPr/>
           <p:nvPr/>
         </p:nvSpPr>
@@ -5635,7 +5635,7 @@
       </p:sp>
       <p:sp>
         <p:nvSpPr>
-          <p:cNvPr id="9" name="Shape 7"/>
+          <p:cNvPr id="10" name="Shape 7"/>
           <p:cNvSpPr/>
           <p:nvPr/>
         </p:nvSpPr>
@@ -5667,7 +5667,7 @@
       </p:sp>
       <p:sp>
         <p:nvSpPr>
-          <p:cNvPr id="10" name="Shape 8"/>
+          <p:cNvPr id="11" name="Shape 8"/>
           <p:cNvSpPr/>
           <p:nvPr/>
         </p:nvSpPr>
@@ -5687,7 +5687,7 @@
       </p:sp>
       <p:sp>
         <p:nvSpPr>
-          <p:cNvPr id="11" name="Text 9"/>
+          <p:cNvPr id="12" name="Text 9"/>
           <p:cNvSpPr/>
           <p:nvPr/>
         </p:nvSpPr>
@@ -5726,7 +5726,7 @@
       </p:sp>
       <p:sp>
         <p:nvSpPr>
-          <p:cNvPr id="12" name="Text 10"/>
+          <p:cNvPr id="13" name="Text 10"/>
           <p:cNvSpPr/>
           <p:nvPr/>
         </p:nvSpPr>
@@ -5765,7 +5765,7 @@
       </p:sp>
       <p:sp>
         <p:nvSpPr>
-          <p:cNvPr id="13" name="Shape 11"/>
+          <p:cNvPr id="14" name="Shape 11"/>
           <p:cNvSpPr/>
           <p:nvPr/>
         </p:nvSpPr>
@@ -5797,7 +5797,7 @@
       </p:sp>
       <p:sp>
         <p:nvSpPr>
-          <p:cNvPr id="14" name="Shape 12"/>
+          <p:cNvPr id="15" name="Shape 12"/>
           <p:cNvSpPr/>
           <p:nvPr/>
         </p:nvSpPr>
@@ -5817,7 +5817,7 @@
       </p:sp>
       <p:sp>
         <p:nvSpPr>
-          <p:cNvPr id="15" name="Text 13"/>
+          <p:cNvPr id="16" name="Text 13"/>
           <p:cNvSpPr/>
           <p:nvPr/>
         </p:nvSpPr>
@@ -5856,7 +5856,7 @@
       </p:sp>
       <p:sp>
         <p:nvSpPr>
-          <p:cNvPr id="16" name="Text 14"/>
+          <p:cNvPr id="17" name="Text 14"/>
           <p:cNvSpPr/>
           <p:nvPr/>
         </p:nvSpPr>
@@ -5895,7 +5895,7 @@
       </p:sp>
       <p:sp>
         <p:nvSpPr>
-          <p:cNvPr id="17" name="Text 15"/>
+          <p:cNvPr id="18" name="Text 15"/>
           <p:cNvSpPr/>
           <p:nvPr/>
         </p:nvSpPr>
@@ -5934,7 +5934,7 @@
       </p:sp>
       <p:sp>
         <p:nvSpPr>
-          <p:cNvPr id="18" name="Text 16"/>
+          <p:cNvPr id="19" name="Text 16"/>
           <p:cNvSpPr/>
           <p:nvPr/>
         </p:nvSpPr>
@@ -6019,7 +6019,7 @@
       </p:grpSpPr>
       <p:sp>
         <p:nvSpPr>
-          <p:cNvPr id="2" name="Shape 0"/>
+          <p:cNvPr id="3" name="Shape 0"/>
           <p:cNvSpPr/>
           <p:nvPr/>
         </p:nvSpPr>
@@ -6039,7 +6039,7 @@
       </p:sp>
       <p:sp>
         <p:nvSpPr>
-          <p:cNvPr id="3" name="Text 1"/>
+          <p:cNvPr id="4" name="Text 1"/>
           <p:cNvSpPr/>
           <p:nvPr/>
         </p:nvSpPr>
@@ -6078,7 +6078,7 @@
       </p:sp>
       <p:sp>
         <p:nvSpPr>
-          <p:cNvPr id="4" name="Text 2"/>
+          <p:cNvPr id="5" name="Text 2"/>
           <p:cNvSpPr/>
           <p:nvPr/>
         </p:nvSpPr>
@@ -6117,7 +6117,7 @@
       </p:sp>
       <p:sp>
         <p:nvSpPr>
-          <p:cNvPr id="5" name="Shape 3"/>
+          <p:cNvPr id="6" name="Shape 3"/>
           <p:cNvSpPr/>
           <p:nvPr/>
         </p:nvSpPr>
@@ -6149,7 +6149,7 @@
       </p:sp>
       <p:sp>
         <p:nvSpPr>
-          <p:cNvPr id="6" name="Text 4"/>
+          <p:cNvPr id="7" name="Text 4"/>
           <p:cNvSpPr/>
           <p:nvPr/>
         </p:nvSpPr>
@@ -6188,7 +6188,7 @@
       </p:sp>
       <p:sp>
         <p:nvSpPr>
-          <p:cNvPr id="7" name="Text 5"/>
+          <p:cNvPr id="8" name="Text 5"/>
           <p:cNvSpPr/>
           <p:nvPr/>
         </p:nvSpPr>
@@ -6230,7 +6230,7 @@
       </p:sp>
       <p:sp>
         <p:nvSpPr>
-          <p:cNvPr id="8" name="Text 6"/>
+          <p:cNvPr id="9" name="Text 6"/>
           <p:cNvSpPr/>
           <p:nvPr/>
         </p:nvSpPr>
@@ -6269,7 +6269,7 @@
       </p:sp>
       <p:sp>
         <p:nvSpPr>
-          <p:cNvPr id="9" name="Shape 7"/>
+          <p:cNvPr id="10" name="Shape 7"/>
           <p:cNvSpPr/>
           <p:nvPr/>
         </p:nvSpPr>
@@ -6301,7 +6301,7 @@
       </p:sp>
       <p:sp>
         <p:nvSpPr>
-          <p:cNvPr id="10" name="Text 8"/>
+          <p:cNvPr id="11" name="Text 8"/>
           <p:cNvSpPr/>
           <p:nvPr/>
         </p:nvSpPr>
@@ -6340,7 +6340,7 @@
       </p:sp>
       <p:sp>
         <p:nvSpPr>
-          <p:cNvPr id="11" name="Text 9"/>
+          <p:cNvPr id="12" name="Text 9"/>
           <p:cNvSpPr/>
           <p:nvPr/>
         </p:nvSpPr>
@@ -6433,7 +6433,7 @@
       </p:sp>
       <p:sp>
         <p:nvSpPr>
-          <p:cNvPr id="12" name="Text 10"/>
+          <p:cNvPr id="13" name="Text 10"/>
           <p:cNvSpPr/>
           <p:nvPr/>
         </p:nvSpPr>
@@ -6486,7 +6486,7 @@
       </p:sp>
       <p:sp>
         <p:nvSpPr>
-          <p:cNvPr id="13" name="Text 11"/>
+          <p:cNvPr id="14" name="Text 11"/>
           <p:cNvSpPr/>
           <p:nvPr/>
         </p:nvSpPr>
@@ -6525,7 +6525,7 @@
       </p:sp>
       <p:sp>
         <p:nvSpPr>
-          <p:cNvPr id="14" name="Text 12"/>
+          <p:cNvPr id="15" name="Text 12"/>
           <p:cNvSpPr/>
           <p:nvPr/>
         </p:nvSpPr>
@@ -6610,7 +6610,7 @@
       </p:grpSpPr>
       <p:sp>
         <p:nvSpPr>
-          <p:cNvPr id="2" name="Shape 0"/>
+          <p:cNvPr id="3" name="Shape 0"/>
           <p:cNvSpPr/>
           <p:nvPr/>
         </p:nvSpPr>
@@ -6630,7 +6630,7 @@
       </p:sp>
       <p:sp>
         <p:nvSpPr>
-          <p:cNvPr id="3" name="Text 1"/>
+          <p:cNvPr id="4" name="Text 1"/>
           <p:cNvSpPr/>
           <p:nvPr/>
         </p:nvSpPr>
@@ -6669,7 +6669,7 @@
       </p:sp>
       <p:sp>
         <p:nvSpPr>
-          <p:cNvPr id="4" name="Text 2"/>
+          <p:cNvPr id="5" name="Text 2"/>
           <p:cNvSpPr/>
           <p:nvPr/>
         </p:nvSpPr>
@@ -6708,7 +6708,7 @@
       </p:sp>
       <p:sp>
         <p:nvSpPr>
-          <p:cNvPr id="5" name="Shape 3"/>
+          <p:cNvPr id="6" name="Shape 3"/>
           <p:cNvSpPr/>
           <p:nvPr/>
         </p:nvSpPr>
@@ -6740,7 +6740,7 @@
       </p:sp>
       <p:sp>
         <p:nvSpPr>
-          <p:cNvPr id="6" name="Text 4"/>
+          <p:cNvPr id="7" name="Text 4"/>
           <p:cNvSpPr/>
           <p:nvPr/>
         </p:nvSpPr>
@@ -6779,7 +6779,7 @@
       </p:sp>
       <p:sp>
         <p:nvSpPr>
-          <p:cNvPr id="7" name="Text 5"/>
+          <p:cNvPr id="8" name="Text 5"/>
           <p:cNvSpPr/>
           <p:nvPr/>
         </p:nvSpPr>
@@ -6841,7 +6841,7 @@
       </p:sp>
       <p:sp>
         <p:nvSpPr>
-          <p:cNvPr id="8" name="Text 6"/>
+          <p:cNvPr id="9" name="Text 6"/>
           <p:cNvSpPr/>
           <p:nvPr/>
         </p:nvSpPr>
@@ -6880,7 +6880,7 @@
       </p:sp>
       <p:sp>
         <p:nvSpPr>
-          <p:cNvPr id="9" name="Shape 7"/>
+          <p:cNvPr id="10" name="Shape 7"/>
           <p:cNvSpPr/>
           <p:nvPr/>
         </p:nvSpPr>
@@ -6912,7 +6912,7 @@
       </p:sp>
       <p:sp>
         <p:nvSpPr>
-          <p:cNvPr id="10" name="Text 8"/>
+          <p:cNvPr id="11" name="Text 8"/>
           <p:cNvSpPr/>
           <p:nvPr/>
         </p:nvSpPr>
@@ -6951,7 +6951,7 @@
       </p:sp>
       <p:sp>
         <p:nvSpPr>
-          <p:cNvPr id="11" name="Text 9"/>
+          <p:cNvPr id="12" name="Text 9"/>
           <p:cNvSpPr/>
           <p:nvPr/>
         </p:nvSpPr>
@@ -7055,7 +7055,7 @@
       </p:sp>
       <p:sp>
         <p:nvSpPr>
-          <p:cNvPr id="12" name="Shape 10"/>
+          <p:cNvPr id="13" name="Shape 10"/>
           <p:cNvSpPr/>
           <p:nvPr/>
         </p:nvSpPr>
@@ -7087,7 +7087,7 @@
       </p:sp>
       <p:sp>
         <p:nvSpPr>
-          <p:cNvPr id="13" name="Text 11"/>
+          <p:cNvPr id="14" name="Text 11"/>
           <p:cNvSpPr/>
           <p:nvPr/>
         </p:nvSpPr>
@@ -7126,7 +7126,7 @@
       </p:sp>
       <p:sp>
         <p:nvSpPr>
-          <p:cNvPr id="14" name="Text 12"/>
+          <p:cNvPr id="15" name="Text 12"/>
           <p:cNvSpPr/>
           <p:nvPr/>
         </p:nvSpPr>
@@ -7302,7 +7302,7 @@
       </p:grpSpPr>
       <p:sp>
         <p:nvSpPr>
-          <p:cNvPr id="2" name="Shape 0"/>
+          <p:cNvPr id="3" name="Shape 0"/>
           <p:cNvSpPr/>
           <p:nvPr/>
         </p:nvSpPr>
@@ -7322,7 +7322,7 @@
       </p:sp>
       <p:sp>
         <p:nvSpPr>
-          <p:cNvPr id="3" name="Text 1"/>
+          <p:cNvPr id="4" name="Text 1"/>
           <p:cNvSpPr/>
           <p:nvPr/>
         </p:nvSpPr>
@@ -7361,7 +7361,7 @@
       </p:sp>
       <p:sp>
         <p:nvSpPr>
-          <p:cNvPr id="4" name="Text 2"/>
+          <p:cNvPr id="5" name="Text 2"/>
           <p:cNvSpPr/>
           <p:nvPr/>
         </p:nvSpPr>
@@ -7400,7 +7400,7 @@
       </p:sp>
       <p:sp>
         <p:nvSpPr>
-          <p:cNvPr id="5" name="Text 3"/>
+          <p:cNvPr id="6" name="Text 3"/>
           <p:cNvSpPr/>
           <p:nvPr/>
         </p:nvSpPr>
@@ -7439,7 +7439,7 @@
       </p:sp>
       <p:sp>
         <p:nvSpPr>
-          <p:cNvPr id="6" name="Shape 4"/>
+          <p:cNvPr id="7" name="Shape 4"/>
           <p:cNvSpPr/>
           <p:nvPr/>
         </p:nvSpPr>
@@ -7471,7 +7471,7 @@
       </p:sp>
       <p:sp>
         <p:nvSpPr>
-          <p:cNvPr id="7" name="Shape 5"/>
+          <p:cNvPr id="8" name="Shape 5"/>
           <p:cNvSpPr/>
           <p:nvPr/>
         </p:nvSpPr>
@@ -7491,7 +7491,7 @@
       </p:sp>
       <p:sp>
         <p:nvSpPr>
-          <p:cNvPr id="8" name="Text 6"/>
+          <p:cNvPr id="9" name="Text 6"/>
           <p:cNvSpPr/>
           <p:nvPr/>
         </p:nvSpPr>
@@ -7530,7 +7530,7 @@
       </p:sp>
       <p:sp>
         <p:nvSpPr>
-          <p:cNvPr id="9" name="Shape 7"/>
+          <p:cNvPr id="10" name="Shape 7"/>
           <p:cNvSpPr/>
           <p:nvPr/>
         </p:nvSpPr>
@@ -7562,7 +7562,7 @@
       </p:sp>
       <p:sp>
         <p:nvSpPr>
-          <p:cNvPr id="10" name="Shape 8"/>
+          <p:cNvPr id="11" name="Shape 8"/>
           <p:cNvSpPr/>
           <p:nvPr/>
         </p:nvSpPr>
@@ -7582,7 +7582,7 @@
       </p:sp>
       <p:sp>
         <p:nvSpPr>
-          <p:cNvPr id="11" name="Text 9"/>
+          <p:cNvPr id="12" name="Text 9"/>
           <p:cNvSpPr/>
           <p:nvPr/>
         </p:nvSpPr>
@@ -7621,7 +7621,7 @@
       </p:sp>
       <p:sp>
         <p:nvSpPr>
-          <p:cNvPr id="12" name="Shape 10"/>
+          <p:cNvPr id="13" name="Shape 10"/>
           <p:cNvSpPr/>
           <p:nvPr/>
         </p:nvSpPr>
@@ -7653,7 +7653,7 @@
       </p:sp>
       <p:sp>
         <p:nvSpPr>
-          <p:cNvPr id="13" name="Shape 11"/>
+          <p:cNvPr id="14" name="Shape 11"/>
           <p:cNvSpPr/>
           <p:nvPr/>
         </p:nvSpPr>
@@ -7673,7 +7673,7 @@
       </p:sp>
       <p:sp>
         <p:nvSpPr>
-          <p:cNvPr id="14" name="Text 12"/>
+          <p:cNvPr id="15" name="Text 12"/>
           <p:cNvSpPr/>
           <p:nvPr/>
         </p:nvSpPr>
@@ -7712,7 +7712,7 @@
       </p:sp>
       <p:sp>
         <p:nvSpPr>
-          <p:cNvPr id="15" name="Shape 13"/>
+          <p:cNvPr id="16" name="Shape 13"/>
           <p:cNvSpPr/>
           <p:nvPr/>
         </p:nvSpPr>
@@ -7744,7 +7744,7 @@
       </p:sp>
       <p:sp>
         <p:nvSpPr>
-          <p:cNvPr id="16" name="Shape 14"/>
+          <p:cNvPr id="17" name="Shape 14"/>
           <p:cNvSpPr/>
           <p:nvPr/>
         </p:nvSpPr>
@@ -7764,7 +7764,7 @@
       </p:sp>
       <p:sp>
         <p:nvSpPr>
-          <p:cNvPr id="17" name="Text 15"/>
+          <p:cNvPr id="18" name="Text 15"/>
           <p:cNvSpPr/>
           <p:nvPr/>
         </p:nvSpPr>
@@ -7803,7 +7803,7 @@
       </p:sp>
       <p:sp>
         <p:nvSpPr>
-          <p:cNvPr id="18" name="Shape 16"/>
+          <p:cNvPr id="19" name="Shape 16"/>
           <p:cNvSpPr/>
           <p:nvPr/>
         </p:nvSpPr>
@@ -7835,7 +7835,7 @@
       </p:sp>
       <p:sp>
         <p:nvSpPr>
-          <p:cNvPr id="19" name="Shape 17"/>
+          <p:cNvPr id="20" name="Shape 17"/>
           <p:cNvSpPr/>
           <p:nvPr/>
         </p:nvSpPr>
@@ -7855,7 +7855,7 @@
       </p:sp>
       <p:sp>
         <p:nvSpPr>
-          <p:cNvPr id="20" name="Text 18"/>
+          <p:cNvPr id="21" name="Text 18"/>
           <p:cNvSpPr/>
           <p:nvPr/>
         </p:nvSpPr>
@@ -7894,7 +7894,7 @@
       </p:sp>
       <p:sp>
         <p:nvSpPr>
-          <p:cNvPr id="21" name="Shape 19"/>
+          <p:cNvPr id="22" name="Shape 19"/>
           <p:cNvSpPr/>
           <p:nvPr/>
         </p:nvSpPr>
@@ -7926,7 +7926,7 @@
       </p:sp>
       <p:sp>
         <p:nvSpPr>
-          <p:cNvPr id="22" name="Shape 20"/>
+          <p:cNvPr id="23" name="Shape 20"/>
           <p:cNvSpPr/>
           <p:nvPr/>
         </p:nvSpPr>
@@ -7946,7 +7946,7 @@
       </p:sp>
       <p:sp>
         <p:nvSpPr>
-          <p:cNvPr id="23" name="Text 21"/>
+          <p:cNvPr id="24" name="Text 21"/>
           <p:cNvSpPr/>
           <p:nvPr/>
         </p:nvSpPr>
@@ -7985,7 +7985,7 @@
       </p:sp>
       <p:sp>
         <p:nvSpPr>
-          <p:cNvPr id="24" name="Text 22"/>
+          <p:cNvPr id="25" name="Text 22"/>
           <p:cNvSpPr/>
           <p:nvPr/>
         </p:nvSpPr>
@@ -8024,7 +8024,7 @@
       </p:sp>
       <p:sp>
         <p:nvSpPr>
-          <p:cNvPr id="25" name="Text 23"/>
+          <p:cNvPr id="26" name="Text 23"/>
           <p:cNvSpPr/>
           <p:nvPr/>
         </p:nvSpPr>
@@ -8109,7 +8109,7 @@
       </p:grpSpPr>
       <p:sp>
         <p:nvSpPr>
-          <p:cNvPr id="2" name="Shape 0"/>
+          <p:cNvPr id="3" name="Shape 0"/>
           <p:cNvSpPr/>
           <p:nvPr/>
         </p:nvSpPr>
@@ -8129,7 +8129,7 @@
       </p:sp>
       <p:sp>
         <p:nvSpPr>
-          <p:cNvPr id="3" name="Text 1"/>
+          <p:cNvPr id="4" name="Text 1"/>
           <p:cNvSpPr/>
           <p:nvPr/>
         </p:nvSpPr>
@@ -8168,7 +8168,7 @@
       </p:sp>
       <p:sp>
         <p:nvSpPr>
-          <p:cNvPr id="4" name="Text 2"/>
+          <p:cNvPr id="5" name="Text 2"/>
           <p:cNvSpPr/>
           <p:nvPr/>
         </p:nvSpPr>
@@ -8207,7 +8207,7 @@
       </p:sp>
       <p:sp>
         <p:nvSpPr>
-          <p:cNvPr id="5" name="Shape 3"/>
+          <p:cNvPr id="6" name="Shape 3"/>
           <p:cNvSpPr/>
           <p:nvPr/>
         </p:nvSpPr>
@@ -8239,7 +8239,7 @@
       </p:sp>
       <p:sp>
         <p:nvSpPr>
-          <p:cNvPr id="6" name="Text 4"/>
+          <p:cNvPr id="7" name="Text 4"/>
           <p:cNvSpPr/>
           <p:nvPr/>
         </p:nvSpPr>
@@ -8278,7 +8278,7 @@
       </p:sp>
       <p:sp>
         <p:nvSpPr>
-          <p:cNvPr id="7" name="Text 5"/>
+          <p:cNvPr id="8" name="Text 5"/>
           <p:cNvSpPr/>
           <p:nvPr/>
         </p:nvSpPr>
@@ -8320,7 +8320,7 @@
       </p:sp>
       <p:sp>
         <p:nvSpPr>
-          <p:cNvPr id="8" name="Shape 6"/>
+          <p:cNvPr id="9" name="Shape 6"/>
           <p:cNvSpPr/>
           <p:nvPr/>
         </p:nvSpPr>
@@ -8352,7 +8352,7 @@
       </p:sp>
       <p:sp>
         <p:nvSpPr>
-          <p:cNvPr id="9" name="Text 7"/>
+          <p:cNvPr id="10" name="Text 7"/>
           <p:cNvSpPr/>
           <p:nvPr/>
         </p:nvSpPr>
@@ -8391,7 +8391,7 @@
       </p:sp>
       <p:sp>
         <p:nvSpPr>
-          <p:cNvPr id="10" name="Text 8"/>
+          <p:cNvPr id="11" name="Text 8"/>
           <p:cNvSpPr/>
           <p:nvPr/>
         </p:nvSpPr>
@@ -8433,7 +8433,7 @@
       </p:sp>
       <p:sp>
         <p:nvSpPr>
-          <p:cNvPr id="11" name="Text 9"/>
+          <p:cNvPr id="12" name="Text 9"/>
           <p:cNvSpPr/>
           <p:nvPr/>
         </p:nvSpPr>
@@ -8472,7 +8472,7 @@
       </p:sp>
       <p:sp>
         <p:nvSpPr>
-          <p:cNvPr id="12" name="Text 10"/>
+          <p:cNvPr id="13" name="Text 10"/>
           <p:cNvSpPr/>
           <p:nvPr/>
         </p:nvSpPr>
@@ -8557,7 +8557,7 @@
       </p:grpSpPr>
       <p:sp>
         <p:nvSpPr>
-          <p:cNvPr id="2" name="Shape 0"/>
+          <p:cNvPr id="3" name="Shape 0"/>
           <p:cNvSpPr/>
           <p:nvPr/>
         </p:nvSpPr>
@@ -8577,7 +8577,7 @@
       </p:sp>
       <p:sp>
         <p:nvSpPr>
-          <p:cNvPr id="3" name="Text 1"/>
+          <p:cNvPr id="4" name="Text 1"/>
           <p:cNvSpPr/>
           <p:nvPr/>
         </p:nvSpPr>
@@ -8616,7 +8616,7 @@
       </p:sp>
       <p:sp>
         <p:nvSpPr>
-          <p:cNvPr id="4" name="Text 2"/>
+          <p:cNvPr id="5" name="Text 2"/>
           <p:cNvSpPr/>
           <p:nvPr/>
         </p:nvSpPr>
@@ -8655,7 +8655,7 @@
       </p:sp>
       <p:sp>
         <p:nvSpPr>
-          <p:cNvPr id="5" name="Text 3"/>
+          <p:cNvPr id="6" name="Text 3"/>
           <p:cNvSpPr/>
           <p:nvPr/>
         </p:nvSpPr>
@@ -8694,7 +8694,7 @@
       </p:sp>
       <p:sp>
         <p:nvSpPr>
-          <p:cNvPr id="6" name="Shape 4"/>
+          <p:cNvPr id="7" name="Shape 4"/>
           <p:cNvSpPr/>
           <p:nvPr/>
         </p:nvSpPr>
@@ -8726,7 +8726,7 @@
       </p:sp>
       <p:sp>
         <p:nvSpPr>
-          <p:cNvPr id="7" name="Text 5"/>
+          <p:cNvPr id="8" name="Text 5"/>
           <p:cNvSpPr/>
           <p:nvPr/>
         </p:nvSpPr>
@@ -8765,7 +8765,7 @@
       </p:sp>
       <p:sp>
         <p:nvSpPr>
-          <p:cNvPr id="8" name="Text 6"/>
+          <p:cNvPr id="9" name="Text 6"/>
           <p:cNvSpPr/>
           <p:nvPr/>
         </p:nvSpPr>
@@ -8824,7 +8824,7 @@
       </p:sp>
       <p:sp>
         <p:nvSpPr>
-          <p:cNvPr id="9" name="Shape 7"/>
+          <p:cNvPr id="10" name="Shape 7"/>
           <p:cNvSpPr/>
           <p:nvPr/>
         </p:nvSpPr>
@@ -8856,7 +8856,7 @@
       </p:sp>
       <p:sp>
         <p:nvSpPr>
-          <p:cNvPr id="10" name="Text 8"/>
+          <p:cNvPr id="11" name="Text 8"/>
           <p:cNvSpPr/>
           <p:nvPr/>
         </p:nvSpPr>
@@ -8895,7 +8895,7 @@
       </p:sp>
       <p:sp>
         <p:nvSpPr>
-          <p:cNvPr id="11" name="Text 9"/>
+          <p:cNvPr id="12" name="Text 9"/>
           <p:cNvSpPr/>
           <p:nvPr/>
         </p:nvSpPr>
@@ -8954,7 +8954,7 @@
       </p:sp>
       <p:sp>
         <p:nvSpPr>
-          <p:cNvPr id="12" name="Text 10"/>
+          <p:cNvPr id="13" name="Text 10"/>
           <p:cNvSpPr/>
           <p:nvPr/>
         </p:nvSpPr>
@@ -8993,7 +8993,7 @@
       </p:sp>
       <p:sp>
         <p:nvSpPr>
-          <p:cNvPr id="13" name="Text 11"/>
+          <p:cNvPr id="14" name="Text 11"/>
           <p:cNvSpPr/>
           <p:nvPr/>
         </p:nvSpPr>
@@ -9183,7 +9183,7 @@
       </p:grpSpPr>
       <p:sp>
         <p:nvSpPr>
-          <p:cNvPr id="2" name="Shape 0"/>
+          <p:cNvPr id="3" name="Shape 0"/>
           <p:cNvSpPr/>
           <p:nvPr/>
         </p:nvSpPr>
@@ -9203,7 +9203,7 @@
       </p:sp>
       <p:sp>
         <p:nvSpPr>
-          <p:cNvPr id="3" name="Text 1"/>
+          <p:cNvPr id="4" name="Text 1"/>
           <p:cNvSpPr/>
           <p:nvPr/>
         </p:nvSpPr>
@@ -9242,7 +9242,7 @@
       </p:sp>
       <p:sp>
         <p:nvSpPr>
-          <p:cNvPr id="4" name="Text 2"/>
+          <p:cNvPr id="5" name="Text 2"/>
           <p:cNvSpPr/>
           <p:nvPr/>
         </p:nvSpPr>
@@ -9281,7 +9281,7 @@
       </p:sp>
       <p:sp>
         <p:nvSpPr>
-          <p:cNvPr id="5" name="Shape 3"/>
+          <p:cNvPr id="6" name="Shape 3"/>
           <p:cNvSpPr/>
           <p:nvPr/>
         </p:nvSpPr>
@@ -9313,7 +9313,7 @@
       </p:sp>
       <p:sp>
         <p:nvSpPr>
-          <p:cNvPr id="6" name="Shape 4"/>
+          <p:cNvPr id="7" name="Shape 4"/>
           <p:cNvSpPr/>
           <p:nvPr/>
         </p:nvSpPr>
@@ -9333,7 +9333,7 @@
       </p:sp>
       <p:sp>
         <p:nvSpPr>
-          <p:cNvPr id="7" name="Text 5"/>
+          <p:cNvPr id="8" name="Text 5"/>
           <p:cNvSpPr/>
           <p:nvPr/>
         </p:nvSpPr>
@@ -9372,7 +9372,7 @@
       </p:sp>
       <p:sp>
         <p:nvSpPr>
-          <p:cNvPr id="8" name="Text 6"/>
+          <p:cNvPr id="9" name="Text 6"/>
           <p:cNvSpPr/>
           <p:nvPr/>
         </p:nvSpPr>
@@ -9411,7 +9411,7 @@
       </p:sp>
       <p:sp>
         <p:nvSpPr>
-          <p:cNvPr id="9" name="Text 7"/>
+          <p:cNvPr id="10" name="Text 7"/>
           <p:cNvSpPr/>
           <p:nvPr/>
         </p:nvSpPr>
@@ -9450,7 +9450,7 @@
       </p:sp>
       <p:sp>
         <p:nvSpPr>
-          <p:cNvPr id="10" name="Shape 8"/>
+          <p:cNvPr id="11" name="Shape 8"/>
           <p:cNvSpPr/>
           <p:nvPr/>
         </p:nvSpPr>
@@ -9482,7 +9482,7 @@
       </p:sp>
       <p:sp>
         <p:nvSpPr>
-          <p:cNvPr id="11" name="Shape 9"/>
+          <p:cNvPr id="12" name="Shape 9"/>
           <p:cNvSpPr/>
           <p:nvPr/>
         </p:nvSpPr>
@@ -9502,7 +9502,7 @@
       </p:sp>
       <p:sp>
         <p:nvSpPr>
-          <p:cNvPr id="12" name="Text 10"/>
+          <p:cNvPr id="13" name="Text 10"/>
           <p:cNvSpPr/>
           <p:nvPr/>
         </p:nvSpPr>
@@ -9541,7 +9541,7 @@
       </p:sp>
       <p:sp>
         <p:nvSpPr>
-          <p:cNvPr id="13" name="Text 11"/>
+          <p:cNvPr id="14" name="Text 11"/>
           <p:cNvSpPr/>
           <p:nvPr/>
         </p:nvSpPr>
@@ -9580,7 +9580,7 @@
       </p:sp>
       <p:sp>
         <p:nvSpPr>
-          <p:cNvPr id="14" name="Text 12"/>
+          <p:cNvPr id="15" name="Text 12"/>
           <p:cNvSpPr/>
           <p:nvPr/>
         </p:nvSpPr>
@@ -9619,7 +9619,7 @@
       </p:sp>
       <p:sp>
         <p:nvSpPr>
-          <p:cNvPr id="15" name="Shape 13"/>
+          <p:cNvPr id="16" name="Shape 13"/>
           <p:cNvSpPr/>
           <p:nvPr/>
         </p:nvSpPr>
@@ -9651,7 +9651,7 @@
       </p:sp>
       <p:sp>
         <p:nvSpPr>
-          <p:cNvPr id="16" name="Shape 14"/>
+          <p:cNvPr id="17" name="Shape 14"/>
           <p:cNvSpPr/>
           <p:nvPr/>
         </p:nvSpPr>
@@ -9671,7 +9671,7 @@
       </p:sp>
       <p:sp>
         <p:nvSpPr>
-          <p:cNvPr id="17" name="Text 15"/>
+          <p:cNvPr id="18" name="Text 15"/>
           <p:cNvSpPr/>
           <p:nvPr/>
         </p:nvSpPr>
@@ -9710,7 +9710,7 @@
       </p:sp>
       <p:sp>
         <p:nvSpPr>
-          <p:cNvPr id="18" name="Text 16"/>
+          <p:cNvPr id="19" name="Text 16"/>
           <p:cNvSpPr/>
           <p:nvPr/>
         </p:nvSpPr>
@@ -9749,7 +9749,7 @@
       </p:sp>
       <p:sp>
         <p:nvSpPr>
-          <p:cNvPr id="19" name="Text 17"/>
+          <p:cNvPr id="20" name="Text 17"/>
           <p:cNvSpPr/>
           <p:nvPr/>
         </p:nvSpPr>
@@ -9788,7 +9788,7 @@
       </p:sp>
       <p:sp>
         <p:nvSpPr>
-          <p:cNvPr id="20" name="Shape 18"/>
+          <p:cNvPr id="21" name="Shape 18"/>
           <p:cNvSpPr/>
           <p:nvPr/>
         </p:nvSpPr>
@@ -9820,7 +9820,7 @@
       </p:sp>
       <p:sp>
         <p:nvSpPr>
-          <p:cNvPr id="21" name="Shape 19"/>
+          <p:cNvPr id="22" name="Shape 19"/>
           <p:cNvSpPr/>
           <p:nvPr/>
         </p:nvSpPr>
@@ -9840,7 +9840,7 @@
       </p:sp>
       <p:sp>
         <p:nvSpPr>
-          <p:cNvPr id="22" name="Text 20"/>
+          <p:cNvPr id="23" name="Text 20"/>
           <p:cNvSpPr/>
           <p:nvPr/>
         </p:nvSpPr>
@@ -9879,7 +9879,7 @@
       </p:sp>
       <p:sp>
         <p:nvSpPr>
-          <p:cNvPr id="23" name="Text 21"/>
+          <p:cNvPr id="24" name="Text 21"/>
           <p:cNvSpPr/>
           <p:nvPr/>
         </p:nvSpPr>
@@ -9918,7 +9918,7 @@
       </p:sp>
       <p:sp>
         <p:nvSpPr>
-          <p:cNvPr id="24" name="Text 22"/>
+          <p:cNvPr id="25" name="Text 22"/>
           <p:cNvSpPr/>
           <p:nvPr/>
         </p:nvSpPr>
@@ -9957,7 +9957,7 @@
       </p:sp>
       <p:sp>
         <p:nvSpPr>
-          <p:cNvPr id="25" name="Shape 23"/>
+          <p:cNvPr id="26" name="Shape 23"/>
           <p:cNvSpPr/>
           <p:nvPr/>
         </p:nvSpPr>
@@ -9989,7 +9989,7 @@
       </p:sp>
       <p:sp>
         <p:nvSpPr>
-          <p:cNvPr id="26" name="Shape 24"/>
+          <p:cNvPr id="27" name="Shape 24"/>
           <p:cNvSpPr/>
           <p:nvPr/>
         </p:nvSpPr>
@@ -10009,7 +10009,7 @@
       </p:sp>
       <p:sp>
         <p:nvSpPr>
-          <p:cNvPr id="27" name="Text 25"/>
+          <p:cNvPr id="28" name="Text 25"/>
           <p:cNvSpPr/>
           <p:nvPr/>
         </p:nvSpPr>
@@ -10048,7 +10048,7 @@
       </p:sp>
       <p:sp>
         <p:nvSpPr>
-          <p:cNvPr id="28" name="Text 26"/>
+          <p:cNvPr id="29" name="Text 26"/>
           <p:cNvSpPr/>
           <p:nvPr/>
         </p:nvSpPr>
@@ -10087,7 +10087,7 @@
       </p:sp>
       <p:sp>
         <p:nvSpPr>
-          <p:cNvPr id="29" name="Text 27"/>
+          <p:cNvPr id="30" name="Text 27"/>
           <p:cNvSpPr/>
           <p:nvPr/>
         </p:nvSpPr>
@@ -10126,7 +10126,7 @@
       </p:sp>
       <p:sp>
         <p:nvSpPr>
-          <p:cNvPr id="30" name="Text 28"/>
+          <p:cNvPr id="31" name="Text 28"/>
           <p:cNvSpPr/>
           <p:nvPr/>
         </p:nvSpPr>
@@ -10165,7 +10165,7 @@
       </p:sp>
       <p:sp>
         <p:nvSpPr>
-          <p:cNvPr id="31" name="Text 29"/>
+          <p:cNvPr id="32" name="Text 29"/>
           <p:cNvSpPr/>
           <p:nvPr/>
         </p:nvSpPr>
@@ -10250,7 +10250,7 @@
       </p:grpSpPr>
       <p:sp>
         <p:nvSpPr>
-          <p:cNvPr id="2" name="Shape 0"/>
+          <p:cNvPr id="3" name="Shape 0"/>
           <p:cNvSpPr/>
           <p:nvPr/>
         </p:nvSpPr>
@@ -10270,7 +10270,7 @@
       </p:sp>
       <p:sp>
         <p:nvSpPr>
-          <p:cNvPr id="3" name="Text 1"/>
+          <p:cNvPr id="4" name="Text 1"/>
           <p:cNvSpPr/>
           <p:nvPr/>
         </p:nvSpPr>
@@ -10309,7 +10309,7 @@
       </p:sp>
       <p:sp>
         <p:nvSpPr>
-          <p:cNvPr id="4" name="Text 2"/>
+          <p:cNvPr id="5" name="Text 2"/>
           <p:cNvSpPr/>
           <p:nvPr/>
         </p:nvSpPr>
@@ -10348,7 +10348,7 @@
       </p:sp>
       <p:sp>
         <p:nvSpPr>
-          <p:cNvPr id="5" name="Text 3"/>
+          <p:cNvPr id="6" name="Text 3"/>
           <p:cNvSpPr/>
           <p:nvPr/>
         </p:nvSpPr>
@@ -10387,7 +10387,7 @@
       </p:sp>
       <p:sp>
         <p:nvSpPr>
-          <p:cNvPr id="6" name="Shape 4"/>
+          <p:cNvPr id="7" name="Shape 4"/>
           <p:cNvSpPr/>
           <p:nvPr/>
         </p:nvSpPr>
@@ -10419,7 +10419,7 @@
       </p:sp>
       <p:sp>
         <p:nvSpPr>
-          <p:cNvPr id="7" name="Text 5"/>
+          <p:cNvPr id="8" name="Text 5"/>
           <p:cNvSpPr/>
           <p:nvPr/>
         </p:nvSpPr>
@@ -10498,7 +10498,7 @@
       </p:sp>
       <p:sp>
         <p:nvSpPr>
-          <p:cNvPr id="8" name="Text 6"/>
+          <p:cNvPr id="9" name="Text 6"/>
           <p:cNvSpPr/>
           <p:nvPr/>
         </p:nvSpPr>
@@ -10537,7 +10537,7 @@
       </p:sp>
       <p:sp>
         <p:nvSpPr>
-          <p:cNvPr id="9" name="Text 7"/>
+          <p:cNvPr id="10" name="Text 7"/>
           <p:cNvSpPr/>
           <p:nvPr/>
         </p:nvSpPr>
@@ -10657,7 +10657,7 @@
       </p:grpSpPr>
       <p:sp>
         <p:nvSpPr>
-          <p:cNvPr id="2" name="Shape 0"/>
+          <p:cNvPr id="3" name="Shape 0"/>
           <p:cNvSpPr/>
           <p:nvPr/>
         </p:nvSpPr>
@@ -10677,7 +10677,7 @@
       </p:sp>
       <p:sp>
         <p:nvSpPr>
-          <p:cNvPr id="3" name="Text 1"/>
+          <p:cNvPr id="4" name="Text 1"/>
           <p:cNvSpPr/>
           <p:nvPr/>
         </p:nvSpPr>
@@ -10716,7 +10716,7 @@
       </p:sp>
       <p:sp>
         <p:nvSpPr>
-          <p:cNvPr id="4" name="Text 2"/>
+          <p:cNvPr id="5" name="Text 2"/>
           <p:cNvSpPr/>
           <p:nvPr/>
         </p:nvSpPr>
@@ -10755,7 +10755,7 @@
       </p:sp>
       <p:sp>
         <p:nvSpPr>
-          <p:cNvPr id="5" name="Shape 3"/>
+          <p:cNvPr id="6" name="Shape 3"/>
           <p:cNvSpPr/>
           <p:nvPr/>
         </p:nvSpPr>
@@ -10787,7 +10787,7 @@
       </p:sp>
       <p:sp>
         <p:nvSpPr>
-          <p:cNvPr id="6" name="Shape 4"/>
+          <p:cNvPr id="7" name="Shape 4"/>
           <p:cNvSpPr/>
           <p:nvPr/>
         </p:nvSpPr>
@@ -10807,7 +10807,7 @@
       </p:sp>
       <p:sp>
         <p:nvSpPr>
-          <p:cNvPr id="7" name="Text 5"/>
+          <p:cNvPr id="8" name="Text 5"/>
           <p:cNvSpPr/>
           <p:nvPr/>
         </p:nvSpPr>
@@ -10846,7 +10846,7 @@
       </p:sp>
       <p:sp>
         <p:nvSpPr>
-          <p:cNvPr id="8" name="Text 6"/>
+          <p:cNvPr id="9" name="Text 6"/>
           <p:cNvSpPr/>
           <p:nvPr/>
         </p:nvSpPr>
@@ -10908,7 +10908,7 @@
       </p:sp>
       <p:sp>
         <p:nvSpPr>
-          <p:cNvPr id="9" name="Shape 7"/>
+          <p:cNvPr id="10" name="Shape 7"/>
           <p:cNvSpPr/>
           <p:nvPr/>
         </p:nvSpPr>
@@ -10940,7 +10940,7 @@
       </p:sp>
       <p:sp>
         <p:nvSpPr>
-          <p:cNvPr id="10" name="Shape 8"/>
+          <p:cNvPr id="11" name="Shape 8"/>
           <p:cNvSpPr/>
           <p:nvPr/>
         </p:nvSpPr>
@@ -10960,7 +10960,7 @@
       </p:sp>
       <p:sp>
         <p:nvSpPr>
-          <p:cNvPr id="11" name="Text 9"/>
+          <p:cNvPr id="12" name="Text 9"/>
           <p:cNvSpPr/>
           <p:nvPr/>
         </p:nvSpPr>
@@ -10999,7 +10999,7 @@
       </p:sp>
       <p:sp>
         <p:nvSpPr>
-          <p:cNvPr id="12" name="Text 10"/>
+          <p:cNvPr id="13" name="Text 10"/>
           <p:cNvSpPr/>
           <p:nvPr/>
         </p:nvSpPr>
@@ -11061,7 +11061,7 @@
       </p:sp>
       <p:sp>
         <p:nvSpPr>
-          <p:cNvPr id="13" name="Shape 11"/>
+          <p:cNvPr id="14" name="Shape 11"/>
           <p:cNvSpPr/>
           <p:nvPr/>
         </p:nvSpPr>
@@ -11093,7 +11093,7 @@
       </p:sp>
       <p:sp>
         <p:nvSpPr>
-          <p:cNvPr id="14" name="Shape 12"/>
+          <p:cNvPr id="15" name="Shape 12"/>
           <p:cNvSpPr/>
           <p:nvPr/>
         </p:nvSpPr>
@@ -11113,7 +11113,7 @@
       </p:sp>
       <p:sp>
         <p:nvSpPr>
-          <p:cNvPr id="15" name="Text 13"/>
+          <p:cNvPr id="16" name="Text 13"/>
           <p:cNvSpPr/>
           <p:nvPr/>
         </p:nvSpPr>
@@ -11152,7 +11152,7 @@
       </p:sp>
       <p:sp>
         <p:nvSpPr>
-          <p:cNvPr id="16" name="Text 14"/>
+          <p:cNvPr id="17" name="Text 14"/>
           <p:cNvSpPr/>
           <p:nvPr/>
         </p:nvSpPr>
@@ -11214,7 +11214,7 @@
       </p:sp>
       <p:sp>
         <p:nvSpPr>
-          <p:cNvPr id="17" name="Shape 15"/>
+          <p:cNvPr id="18" name="Shape 15"/>
           <p:cNvSpPr/>
           <p:nvPr/>
         </p:nvSpPr>
@@ -11246,7 +11246,7 @@
       </p:sp>
       <p:sp>
         <p:nvSpPr>
-          <p:cNvPr id="18" name="Text 16"/>
+          <p:cNvPr id="19" name="Text 16"/>
           <p:cNvSpPr/>
           <p:nvPr/>
         </p:nvSpPr>
@@ -11285,7 +11285,7 @@
       </p:sp>
       <p:sp>
         <p:nvSpPr>
-          <p:cNvPr id="19" name="Text 17"/>
+          <p:cNvPr id="20" name="Text 17"/>
           <p:cNvSpPr/>
           <p:nvPr/>
         </p:nvSpPr>
@@ -11367,7 +11367,7 @@
       </p:sp>
       <p:sp>
         <p:nvSpPr>
-          <p:cNvPr id="20" name="Text 18"/>
+          <p:cNvPr id="21" name="Text 18"/>
           <p:cNvSpPr/>
           <p:nvPr/>
         </p:nvSpPr>
@@ -11487,7 +11487,7 @@
       </p:grpSpPr>
       <p:sp>
         <p:nvSpPr>
-          <p:cNvPr id="2" name="Shape 0"/>
+          <p:cNvPr id="3" name="Shape 0"/>
           <p:cNvSpPr/>
           <p:nvPr/>
         </p:nvSpPr>
@@ -11507,7 +11507,7 @@
       </p:sp>
       <p:sp>
         <p:nvSpPr>
-          <p:cNvPr id="3" name="Text 1"/>
+          <p:cNvPr id="4" name="Text 1"/>
           <p:cNvSpPr/>
           <p:nvPr/>
         </p:nvSpPr>
@@ -11546,7 +11546,7 @@
       </p:sp>
       <p:sp>
         <p:nvSpPr>
-          <p:cNvPr id="4" name="Shape 2"/>
+          <p:cNvPr id="5" name="Shape 2"/>
           <p:cNvSpPr/>
           <p:nvPr/>
         </p:nvSpPr>
@@ -11568,7 +11568,7 @@
       </p:sp>
       <p:sp>
         <p:nvSpPr>
-          <p:cNvPr id="5" name="Text 3"/>
+          <p:cNvPr id="6" name="Text 3"/>
           <p:cNvSpPr/>
           <p:nvPr/>
         </p:nvSpPr>
@@ -11607,7 +11607,7 @@
       </p:sp>
       <p:sp>
         <p:nvSpPr>
-          <p:cNvPr id="6" name="Text 4"/>
+          <p:cNvPr id="7" name="Text 4"/>
           <p:cNvSpPr/>
           <p:nvPr/>
         </p:nvSpPr>
@@ -11646,7 +11646,7 @@
       </p:sp>
       <p:sp>
         <p:nvSpPr>
-          <p:cNvPr id="7" name="Shape 5"/>
+          <p:cNvPr id="8" name="Shape 5"/>
           <p:cNvSpPr/>
           <p:nvPr/>
         </p:nvSpPr>
@@ -11668,7 +11668,7 @@
       </p:sp>
       <p:sp>
         <p:nvSpPr>
-          <p:cNvPr id="8" name="Text 6"/>
+          <p:cNvPr id="9" name="Text 6"/>
           <p:cNvSpPr/>
           <p:nvPr/>
         </p:nvSpPr>
@@ -11707,7 +11707,7 @@
       </p:sp>
       <p:sp>
         <p:nvSpPr>
-          <p:cNvPr id="9" name="Text 7"/>
+          <p:cNvPr id="10" name="Text 7"/>
           <p:cNvSpPr/>
           <p:nvPr/>
         </p:nvSpPr>
@@ -11746,7 +11746,7 @@
       </p:sp>
       <p:sp>
         <p:nvSpPr>
-          <p:cNvPr id="10" name="Shape 8"/>
+          <p:cNvPr id="11" name="Shape 8"/>
           <p:cNvSpPr/>
           <p:nvPr/>
         </p:nvSpPr>
@@ -11768,7 +11768,7 @@
       </p:sp>
       <p:sp>
         <p:nvSpPr>
-          <p:cNvPr id="11" name="Text 9"/>
+          <p:cNvPr id="12" name="Text 9"/>
           <p:cNvSpPr/>
           <p:nvPr/>
         </p:nvSpPr>
@@ -11807,7 +11807,7 @@
       </p:sp>
       <p:sp>
         <p:nvSpPr>
-          <p:cNvPr id="12" name="Text 10"/>
+          <p:cNvPr id="13" name="Text 10"/>
           <p:cNvSpPr/>
           <p:nvPr/>
         </p:nvSpPr>
@@ -11846,7 +11846,7 @@
       </p:sp>
       <p:sp>
         <p:nvSpPr>
-          <p:cNvPr id="13" name="Text 11"/>
+          <p:cNvPr id="14" name="Text 11"/>
           <p:cNvSpPr/>
           <p:nvPr/>
         </p:nvSpPr>
@@ -11885,7 +11885,7 @@
       </p:sp>
       <p:sp>
         <p:nvSpPr>
-          <p:cNvPr id="14" name="Text 12"/>
+          <p:cNvPr id="15" name="Text 12"/>
           <p:cNvSpPr/>
           <p:nvPr/>
         </p:nvSpPr>
@@ -11970,7 +11970,7 @@
       </p:grpSpPr>
       <p:sp>
         <p:nvSpPr>
-          <p:cNvPr id="2" name="Shape 0"/>
+          <p:cNvPr id="3" name="Shape 0"/>
           <p:cNvSpPr/>
           <p:nvPr/>
         </p:nvSpPr>
@@ -11990,7 +11990,7 @@
       </p:sp>
       <p:sp>
         <p:nvSpPr>
-          <p:cNvPr id="3" name="Text 1"/>
+          <p:cNvPr id="4" name="Text 1"/>
           <p:cNvSpPr/>
           <p:nvPr/>
         </p:nvSpPr>
@@ -12029,7 +12029,7 @@
       </p:sp>
       <p:sp>
         <p:nvSpPr>
-          <p:cNvPr id="4" name="Text 2"/>
+          <p:cNvPr id="5" name="Text 2"/>
           <p:cNvSpPr/>
           <p:nvPr/>
         </p:nvSpPr>
@@ -12068,7 +12068,7 @@
       </p:sp>
       <p:sp>
         <p:nvSpPr>
-          <p:cNvPr id="5" name="Text 3"/>
+          <p:cNvPr id="6" name="Text 3"/>
           <p:cNvSpPr/>
           <p:nvPr/>
         </p:nvSpPr>
@@ -12107,7 +12107,7 @@
       </p:sp>
       <p:sp>
         <p:nvSpPr>
-          <p:cNvPr id="6" name="Shape 4"/>
+          <p:cNvPr id="7" name="Shape 4"/>
           <p:cNvSpPr/>
           <p:nvPr/>
         </p:nvSpPr>
@@ -12139,7 +12139,7 @@
       </p:sp>
       <p:sp>
         <p:nvSpPr>
-          <p:cNvPr id="7" name="Shape 5"/>
+          <p:cNvPr id="8" name="Shape 5"/>
           <p:cNvSpPr/>
           <p:nvPr/>
         </p:nvSpPr>
@@ -12159,7 +12159,7 @@
       </p:sp>
       <p:sp>
         <p:nvSpPr>
-          <p:cNvPr id="8" name="Text 6"/>
+          <p:cNvPr id="9" name="Text 6"/>
           <p:cNvSpPr/>
           <p:nvPr/>
         </p:nvSpPr>
@@ -12198,7 +12198,7 @@
       </p:sp>
       <p:sp>
         <p:nvSpPr>
-          <p:cNvPr id="9" name="Text 7"/>
+          <p:cNvPr id="10" name="Text 7"/>
           <p:cNvSpPr/>
           <p:nvPr/>
         </p:nvSpPr>
@@ -12237,7 +12237,7 @@
       </p:sp>
       <p:sp>
         <p:nvSpPr>
-          <p:cNvPr id="10" name="Shape 8"/>
+          <p:cNvPr id="11" name="Shape 8"/>
           <p:cNvSpPr/>
           <p:nvPr/>
         </p:nvSpPr>
@@ -12269,7 +12269,7 @@
       </p:sp>
       <p:sp>
         <p:nvSpPr>
-          <p:cNvPr id="11" name="Shape 9"/>
+          <p:cNvPr id="12" name="Shape 9"/>
           <p:cNvSpPr/>
           <p:nvPr/>
         </p:nvSpPr>
@@ -12289,7 +12289,7 @@
       </p:sp>
       <p:sp>
         <p:nvSpPr>
-          <p:cNvPr id="12" name="Text 10"/>
+          <p:cNvPr id="13" name="Text 10"/>
           <p:cNvSpPr/>
           <p:nvPr/>
         </p:nvSpPr>
@@ -12328,7 +12328,7 @@
       </p:sp>
       <p:sp>
         <p:nvSpPr>
-          <p:cNvPr id="13" name="Text 11"/>
+          <p:cNvPr id="14" name="Text 11"/>
           <p:cNvSpPr/>
           <p:nvPr/>
         </p:nvSpPr>
@@ -12367,7 +12367,7 @@
       </p:sp>
       <p:sp>
         <p:nvSpPr>
-          <p:cNvPr id="14" name="Shape 12"/>
+          <p:cNvPr id="15" name="Shape 12"/>
           <p:cNvSpPr/>
           <p:nvPr/>
         </p:nvSpPr>
@@ -12399,7 +12399,7 @@
       </p:sp>
       <p:sp>
         <p:nvSpPr>
-          <p:cNvPr id="15" name="Shape 13"/>
+          <p:cNvPr id="16" name="Shape 13"/>
           <p:cNvSpPr/>
           <p:nvPr/>
         </p:nvSpPr>
@@ -12419,7 +12419,7 @@
       </p:sp>
       <p:sp>
         <p:nvSpPr>
-          <p:cNvPr id="16" name="Text 14"/>
+          <p:cNvPr id="17" name="Text 14"/>
           <p:cNvSpPr/>
           <p:nvPr/>
         </p:nvSpPr>
@@ -12458,7 +12458,7 @@
       </p:sp>
       <p:sp>
         <p:nvSpPr>
-          <p:cNvPr id="17" name="Text 15"/>
+          <p:cNvPr id="18" name="Text 15"/>
           <p:cNvSpPr/>
           <p:nvPr/>
         </p:nvSpPr>
@@ -12497,7 +12497,7 @@
       </p:sp>
       <p:sp>
         <p:nvSpPr>
-          <p:cNvPr id="18" name="Shape 16"/>
+          <p:cNvPr id="19" name="Shape 16"/>
           <p:cNvSpPr/>
           <p:nvPr/>
         </p:nvSpPr>
@@ -12529,7 +12529,7 @@
       </p:sp>
       <p:sp>
         <p:nvSpPr>
-          <p:cNvPr id="19" name="Text 17"/>
+          <p:cNvPr id="20" name="Text 17"/>
           <p:cNvSpPr/>
           <p:nvPr/>
         </p:nvSpPr>
@@ -12588,7 +12588,7 @@
       </p:sp>
       <p:sp>
         <p:nvSpPr>
-          <p:cNvPr id="20" name="Text 18"/>
+          <p:cNvPr id="21" name="Text 18"/>
           <p:cNvSpPr/>
           <p:nvPr/>
         </p:nvSpPr>
@@ -12708,7 +12708,7 @@
       </p:grpSpPr>
       <p:sp>
         <p:nvSpPr>
-          <p:cNvPr id="2" name="Shape 0"/>
+          <p:cNvPr id="3" name="Shape 0"/>
           <p:cNvSpPr/>
           <p:nvPr/>
         </p:nvSpPr>
@@ -12728,7 +12728,7 @@
       </p:sp>
       <p:sp>
         <p:nvSpPr>
-          <p:cNvPr id="3" name="Text 1"/>
+          <p:cNvPr id="4" name="Text 1"/>
           <p:cNvSpPr/>
           <p:nvPr/>
         </p:nvSpPr>
@@ -12767,7 +12767,7 @@
       </p:sp>
       <p:sp>
         <p:nvSpPr>
-          <p:cNvPr id="4" name="Text 2"/>
+          <p:cNvPr id="5" name="Text 2"/>
           <p:cNvSpPr/>
           <p:nvPr/>
         </p:nvSpPr>
@@ -12806,7 +12806,7 @@
       </p:sp>
       <p:sp>
         <p:nvSpPr>
-          <p:cNvPr id="5" name="Text 3"/>
+          <p:cNvPr id="6" name="Text 3"/>
           <p:cNvSpPr/>
           <p:nvPr/>
         </p:nvSpPr>
@@ -12845,7 +12845,7 @@
       </p:sp>
       <p:sp>
         <p:nvSpPr>
-          <p:cNvPr id="6" name="Shape 4"/>
+          <p:cNvPr id="7" name="Shape 4"/>
           <p:cNvSpPr/>
           <p:nvPr/>
         </p:nvSpPr>
@@ -12877,7 +12877,7 @@
       </p:sp>
       <p:sp>
         <p:nvSpPr>
-          <p:cNvPr id="7" name="Text 5"/>
+          <p:cNvPr id="8" name="Text 5"/>
           <p:cNvSpPr/>
           <p:nvPr/>
         </p:nvSpPr>
@@ -12950,7 +12950,7 @@
       </p:sp>
       <p:sp>
         <p:nvSpPr>
-          <p:cNvPr id="8" name="Shape 6"/>
+          <p:cNvPr id="9" name="Shape 6"/>
           <p:cNvSpPr/>
           <p:nvPr/>
         </p:nvSpPr>
@@ -12982,7 +12982,7 @@
       </p:sp>
       <p:sp>
         <p:nvSpPr>
-          <p:cNvPr id="9" name="Text 7"/>
+          <p:cNvPr id="10" name="Text 7"/>
           <p:cNvSpPr/>
           <p:nvPr/>
         </p:nvSpPr>
@@ -13055,7 +13055,7 @@
       </p:sp>
       <p:sp>
         <p:nvSpPr>
-          <p:cNvPr id="10" name="Text 8"/>
+          <p:cNvPr id="11" name="Text 8"/>
           <p:cNvSpPr/>
           <p:nvPr/>
         </p:nvSpPr>
@@ -13094,7 +13094,7 @@
       </p:sp>
       <p:sp>
         <p:nvSpPr>
-          <p:cNvPr id="11" name="Text 9"/>
+          <p:cNvPr id="12" name="Text 9"/>
           <p:cNvSpPr/>
           <p:nvPr/>
         </p:nvSpPr>
@@ -13200,7 +13200,7 @@
       </p:grpSpPr>
       <p:sp>
         <p:nvSpPr>
-          <p:cNvPr id="2" name="Shape 0"/>
+          <p:cNvPr id="3" name="Shape 0"/>
           <p:cNvSpPr/>
           <p:nvPr/>
         </p:nvSpPr>
@@ -13220,7 +13220,7 @@
       </p:sp>
       <p:sp>
         <p:nvSpPr>
-          <p:cNvPr id="3" name="Text 1"/>
+          <p:cNvPr id="4" name="Text 1"/>
           <p:cNvSpPr/>
           <p:nvPr/>
         </p:nvSpPr>
@@ -13259,7 +13259,7 @@
       </p:sp>
       <p:sp>
         <p:nvSpPr>
-          <p:cNvPr id="4" name="Text 2"/>
+          <p:cNvPr id="5" name="Text 2"/>
           <p:cNvSpPr/>
           <p:nvPr/>
         </p:nvSpPr>
@@ -13298,7 +13298,7 @@
       </p:sp>
       <p:sp>
         <p:nvSpPr>
-          <p:cNvPr id="5" name="Shape 3"/>
+          <p:cNvPr id="6" name="Shape 3"/>
           <p:cNvSpPr/>
           <p:nvPr/>
         </p:nvSpPr>
@@ -13330,7 +13330,7 @@
       </p:sp>
       <p:sp>
         <p:nvSpPr>
-          <p:cNvPr id="6" name="Shape 4"/>
+          <p:cNvPr id="7" name="Shape 4"/>
           <p:cNvSpPr/>
           <p:nvPr/>
         </p:nvSpPr>
@@ -13350,7 +13350,7 @@
       </p:sp>
       <p:sp>
         <p:nvSpPr>
-          <p:cNvPr id="7" name="Text 5"/>
+          <p:cNvPr id="8" name="Text 5"/>
           <p:cNvSpPr/>
           <p:nvPr/>
         </p:nvSpPr>
@@ -13389,7 +13389,7 @@
       </p:sp>
       <p:sp>
         <p:nvSpPr>
-          <p:cNvPr id="8" name="Text 6"/>
+          <p:cNvPr id="9" name="Text 6"/>
           <p:cNvSpPr/>
           <p:nvPr/>
         </p:nvSpPr>
@@ -13451,7 +13451,7 @@
       </p:sp>
       <p:sp>
         <p:nvSpPr>
-          <p:cNvPr id="9" name="Shape 7"/>
+          <p:cNvPr id="10" name="Shape 7"/>
           <p:cNvSpPr/>
           <p:nvPr/>
         </p:nvSpPr>
@@ -13483,7 +13483,7 @@
       </p:sp>
       <p:sp>
         <p:nvSpPr>
-          <p:cNvPr id="10" name="Shape 8"/>
+          <p:cNvPr id="11" name="Shape 8"/>
           <p:cNvSpPr/>
           <p:nvPr/>
         </p:nvSpPr>
@@ -13503,7 +13503,7 @@
       </p:sp>
       <p:sp>
         <p:nvSpPr>
-          <p:cNvPr id="11" name="Text 9"/>
+          <p:cNvPr id="12" name="Text 9"/>
           <p:cNvSpPr/>
           <p:nvPr/>
         </p:nvSpPr>
@@ -13542,7 +13542,7 @@
       </p:sp>
       <p:sp>
         <p:nvSpPr>
-          <p:cNvPr id="12" name="Text 10"/>
+          <p:cNvPr id="13" name="Text 10"/>
           <p:cNvSpPr/>
           <p:nvPr/>
         </p:nvSpPr>
@@ -13604,7 +13604,7 @@
       </p:sp>
       <p:sp>
         <p:nvSpPr>
-          <p:cNvPr id="13" name="Shape 11"/>
+          <p:cNvPr id="14" name="Shape 11"/>
           <p:cNvSpPr/>
           <p:nvPr/>
         </p:nvSpPr>
@@ -13636,7 +13636,7 @@
       </p:sp>
       <p:sp>
         <p:nvSpPr>
-          <p:cNvPr id="14" name="Shape 12"/>
+          <p:cNvPr id="15" name="Shape 12"/>
           <p:cNvSpPr/>
           <p:nvPr/>
         </p:nvSpPr>
@@ -13656,7 +13656,7 @@
       </p:sp>
       <p:sp>
         <p:nvSpPr>
-          <p:cNvPr id="15" name="Text 13"/>
+          <p:cNvPr id="16" name="Text 13"/>
           <p:cNvSpPr/>
           <p:nvPr/>
         </p:nvSpPr>
@@ -13695,7 +13695,7 @@
       </p:sp>
       <p:sp>
         <p:nvSpPr>
-          <p:cNvPr id="16" name="Text 14"/>
+          <p:cNvPr id="17" name="Text 14"/>
           <p:cNvSpPr/>
           <p:nvPr/>
         </p:nvSpPr>
@@ -13757,7 +13757,7 @@
       </p:sp>
       <p:sp>
         <p:nvSpPr>
-          <p:cNvPr id="17" name="Text 15"/>
+          <p:cNvPr id="18" name="Text 15"/>
           <p:cNvSpPr/>
           <p:nvPr/>
         </p:nvSpPr>
@@ -13796,7 +13796,7 @@
       </p:sp>
       <p:sp>
         <p:nvSpPr>
-          <p:cNvPr id="18" name="Text 16"/>
+          <p:cNvPr id="19" name="Text 16"/>
           <p:cNvSpPr/>
           <p:nvPr/>
         </p:nvSpPr>
@@ -13951,7 +13951,7 @@
       </p:grpSpPr>
       <p:sp>
         <p:nvSpPr>
-          <p:cNvPr id="2" name="Shape 0"/>
+          <p:cNvPr id="3" name="Shape 0"/>
           <p:cNvSpPr/>
           <p:nvPr/>
         </p:nvSpPr>
@@ -13971,7 +13971,7 @@
       </p:sp>
       <p:sp>
         <p:nvSpPr>
-          <p:cNvPr id="3" name="Text 1"/>
+          <p:cNvPr id="4" name="Text 1"/>
           <p:cNvSpPr/>
           <p:nvPr/>
         </p:nvSpPr>
@@ -14010,7 +14010,7 @@
       </p:sp>
       <p:sp>
         <p:nvSpPr>
-          <p:cNvPr id="4" name="Text 2"/>
+          <p:cNvPr id="5" name="Text 2"/>
           <p:cNvSpPr/>
           <p:nvPr/>
         </p:nvSpPr>
@@ -14049,7 +14049,7 @@
       </p:sp>
       <p:sp>
         <p:nvSpPr>
-          <p:cNvPr id="5" name="Shape 3"/>
+          <p:cNvPr id="6" name="Shape 3"/>
           <p:cNvSpPr/>
           <p:nvPr/>
         </p:nvSpPr>
@@ -14081,7 +14081,7 @@
       </p:sp>
       <p:sp>
         <p:nvSpPr>
-          <p:cNvPr id="6" name="Shape 4"/>
+          <p:cNvPr id="7" name="Shape 4"/>
           <p:cNvSpPr/>
           <p:nvPr/>
         </p:nvSpPr>
@@ -14101,7 +14101,7 @@
       </p:sp>
       <p:sp>
         <p:nvSpPr>
-          <p:cNvPr id="7" name="Text 5"/>
+          <p:cNvPr id="8" name="Text 5"/>
           <p:cNvSpPr/>
           <p:nvPr/>
         </p:nvSpPr>
@@ -14140,7 +14140,7 @@
       </p:sp>
       <p:sp>
         <p:nvSpPr>
-          <p:cNvPr id="8" name="Text 6"/>
+          <p:cNvPr id="9" name="Text 6"/>
           <p:cNvSpPr/>
           <p:nvPr/>
         </p:nvSpPr>
@@ -14179,7 +14179,7 @@
       </p:sp>
       <p:sp>
         <p:nvSpPr>
-          <p:cNvPr id="9" name="Shape 7"/>
+          <p:cNvPr id="10" name="Shape 7"/>
           <p:cNvSpPr/>
           <p:nvPr/>
         </p:nvSpPr>
@@ -14211,7 +14211,7 @@
       </p:sp>
       <p:sp>
         <p:nvSpPr>
-          <p:cNvPr id="10" name="Shape 8"/>
+          <p:cNvPr id="11" name="Shape 8"/>
           <p:cNvSpPr/>
           <p:nvPr/>
         </p:nvSpPr>
@@ -14231,7 +14231,7 @@
       </p:sp>
       <p:sp>
         <p:nvSpPr>
-          <p:cNvPr id="11" name="Text 9"/>
+          <p:cNvPr id="12" name="Text 9"/>
           <p:cNvSpPr/>
           <p:nvPr/>
         </p:nvSpPr>
@@ -14270,7 +14270,7 @@
       </p:sp>
       <p:sp>
         <p:nvSpPr>
-          <p:cNvPr id="12" name="Text 10"/>
+          <p:cNvPr id="13" name="Text 10"/>
           <p:cNvSpPr/>
           <p:nvPr/>
         </p:nvSpPr>
@@ -14309,7 +14309,7 @@
       </p:sp>
       <p:sp>
         <p:nvSpPr>
-          <p:cNvPr id="13" name="Shape 11"/>
+          <p:cNvPr id="14" name="Shape 11"/>
           <p:cNvSpPr/>
           <p:nvPr/>
         </p:nvSpPr>
@@ -14341,7 +14341,7 @@
       </p:sp>
       <p:sp>
         <p:nvSpPr>
-          <p:cNvPr id="14" name="Shape 12"/>
+          <p:cNvPr id="15" name="Shape 12"/>
           <p:cNvSpPr/>
           <p:nvPr/>
         </p:nvSpPr>
@@ -14361,7 +14361,7 @@
       </p:sp>
       <p:sp>
         <p:nvSpPr>
-          <p:cNvPr id="15" name="Text 13"/>
+          <p:cNvPr id="16" name="Text 13"/>
           <p:cNvSpPr/>
           <p:nvPr/>
         </p:nvSpPr>
@@ -14400,7 +14400,7 @@
       </p:sp>
       <p:sp>
         <p:nvSpPr>
-          <p:cNvPr id="16" name="Text 14"/>
+          <p:cNvPr id="17" name="Text 14"/>
           <p:cNvSpPr/>
           <p:nvPr/>
         </p:nvSpPr>
@@ -14439,7 +14439,7 @@
       </p:sp>
       <p:sp>
         <p:nvSpPr>
-          <p:cNvPr id="17" name="Shape 15"/>
+          <p:cNvPr id="18" name="Shape 15"/>
           <p:cNvSpPr/>
           <p:nvPr/>
         </p:nvSpPr>
@@ -14471,7 +14471,7 @@
       </p:sp>
       <p:sp>
         <p:nvSpPr>
-          <p:cNvPr id="18" name="Shape 16"/>
+          <p:cNvPr id="19" name="Shape 16"/>
           <p:cNvSpPr/>
           <p:nvPr/>
         </p:nvSpPr>
@@ -14491,7 +14491,7 @@
       </p:sp>
       <p:sp>
         <p:nvSpPr>
-          <p:cNvPr id="19" name="Text 17"/>
+          <p:cNvPr id="20" name="Text 17"/>
           <p:cNvSpPr/>
           <p:nvPr/>
         </p:nvSpPr>
@@ -14530,7 +14530,7 @@
       </p:sp>
       <p:sp>
         <p:nvSpPr>
-          <p:cNvPr id="20" name="Text 18"/>
+          <p:cNvPr id="21" name="Text 18"/>
           <p:cNvSpPr/>
           <p:nvPr/>
         </p:nvSpPr>
@@ -14569,7 +14569,7 @@
       </p:sp>
       <p:sp>
         <p:nvSpPr>
-          <p:cNvPr id="21" name="Text 19"/>
+          <p:cNvPr id="22" name="Text 19"/>
           <p:cNvSpPr/>
           <p:nvPr/>
         </p:nvSpPr>
@@ -14608,7 +14608,7 @@
       </p:sp>
       <p:sp>
         <p:nvSpPr>
-          <p:cNvPr id="22" name="Text 20"/>
+          <p:cNvPr id="23" name="Text 20"/>
           <p:cNvSpPr/>
           <p:nvPr/>
         </p:nvSpPr>
@@ -14693,7 +14693,7 @@
       </p:grpSpPr>
       <p:sp>
         <p:nvSpPr>
-          <p:cNvPr id="2" name="Shape 0"/>
+          <p:cNvPr id="3" name="Shape 0"/>
           <p:cNvSpPr/>
           <p:nvPr/>
         </p:nvSpPr>
@@ -14713,7 +14713,7 @@
       </p:sp>
       <p:sp>
         <p:nvSpPr>
-          <p:cNvPr id="3" name="Text 1"/>
+          <p:cNvPr id="4" name="Text 1"/>
           <p:cNvSpPr/>
           <p:nvPr/>
         </p:nvSpPr>
@@ -14752,7 +14752,7 @@
       </p:sp>
       <p:sp>
         <p:nvSpPr>
-          <p:cNvPr id="4" name="Text 2"/>
+          <p:cNvPr id="5" name="Text 2"/>
           <p:cNvSpPr/>
           <p:nvPr/>
         </p:nvSpPr>
@@ -14814,7 +14814,7 @@
       </p:sp>
       <p:sp>
         <p:nvSpPr>
-          <p:cNvPr id="5" name="Shape 3"/>
+          <p:cNvPr id="6" name="Shape 3"/>
           <p:cNvSpPr/>
           <p:nvPr/>
         </p:nvSpPr>
@@ -14836,7 +14836,7 @@
       </p:sp>
       <p:sp>
         <p:nvSpPr>
-          <p:cNvPr id="6" name="Text 4"/>
+          <p:cNvPr id="7" name="Text 4"/>
           <p:cNvSpPr/>
           <p:nvPr/>
         </p:nvSpPr>
@@ -14875,7 +14875,7 @@
       </p:sp>
       <p:sp>
         <p:nvSpPr>
-          <p:cNvPr id="7" name="Text 5"/>
+          <p:cNvPr id="8" name="Text 5"/>
           <p:cNvSpPr/>
           <p:nvPr/>
         </p:nvSpPr>
@@ -14914,7 +14914,7 @@
       </p:sp>
       <p:sp>
         <p:nvSpPr>
-          <p:cNvPr id="8" name="Shape 6"/>
+          <p:cNvPr id="9" name="Shape 6"/>
           <p:cNvSpPr/>
           <p:nvPr/>
         </p:nvSpPr>
@@ -14936,7 +14936,7 @@
       </p:sp>
       <p:sp>
         <p:nvSpPr>
-          <p:cNvPr id="9" name="Text 7"/>
+          <p:cNvPr id="10" name="Text 7"/>
           <p:cNvSpPr/>
           <p:nvPr/>
         </p:nvSpPr>
@@ -14975,7 +14975,7 @@
       </p:sp>
       <p:sp>
         <p:nvSpPr>
-          <p:cNvPr id="10" name="Text 8"/>
+          <p:cNvPr id="11" name="Text 8"/>
           <p:cNvSpPr/>
           <p:nvPr/>
         </p:nvSpPr>
@@ -15014,7 +15014,7 @@
       </p:sp>
       <p:sp>
         <p:nvSpPr>
-          <p:cNvPr id="11" name="Shape 9"/>
+          <p:cNvPr id="12" name="Shape 9"/>
           <p:cNvSpPr/>
           <p:nvPr/>
         </p:nvSpPr>
@@ -15036,7 +15036,7 @@
       </p:sp>
       <p:sp>
         <p:nvSpPr>
-          <p:cNvPr id="12" name="Text 10"/>
+          <p:cNvPr id="13" name="Text 10"/>
           <p:cNvSpPr/>
           <p:nvPr/>
         </p:nvSpPr>
@@ -15075,7 +15075,7 @@
       </p:sp>
       <p:sp>
         <p:nvSpPr>
-          <p:cNvPr id="13" name="Text 11"/>
+          <p:cNvPr id="14" name="Text 11"/>
           <p:cNvSpPr/>
           <p:nvPr/>
         </p:nvSpPr>
@@ -15128,7 +15128,7 @@
       </p:sp>
       <p:sp>
         <p:nvSpPr>
-          <p:cNvPr id="14" name="Text 12"/>
+          <p:cNvPr id="15" name="Text 12"/>
           <p:cNvSpPr/>
           <p:nvPr/>
         </p:nvSpPr>
@@ -15213,7 +15213,7 @@
       </p:grpSpPr>
       <p:sp>
         <p:nvSpPr>
-          <p:cNvPr id="2" name="Shape 0"/>
+          <p:cNvPr id="3" name="Shape 0"/>
           <p:cNvSpPr/>
           <p:nvPr/>
         </p:nvSpPr>
@@ -15233,7 +15233,7 @@
       </p:sp>
       <p:sp>
         <p:nvSpPr>
-          <p:cNvPr id="3" name="Text 1"/>
+          <p:cNvPr id="4" name="Text 1"/>
           <p:cNvSpPr/>
           <p:nvPr/>
         </p:nvSpPr>
@@ -15272,7 +15272,7 @@
       </p:sp>
       <p:sp>
         <p:nvSpPr>
-          <p:cNvPr id="4" name="Text 2"/>
+          <p:cNvPr id="5" name="Text 2"/>
           <p:cNvSpPr/>
           <p:nvPr/>
         </p:nvSpPr>
@@ -15311,7 +15311,7 @@
       </p:sp>
       <p:sp>
         <p:nvSpPr>
-          <p:cNvPr id="5" name="Shape 3"/>
+          <p:cNvPr id="6" name="Shape 3"/>
           <p:cNvSpPr/>
           <p:nvPr/>
         </p:nvSpPr>
@@ -15343,7 +15343,7 @@
       </p:sp>
       <p:sp>
         <p:nvSpPr>
-          <p:cNvPr id="6" name="Shape 4"/>
+          <p:cNvPr id="7" name="Shape 4"/>
           <p:cNvSpPr/>
           <p:nvPr/>
         </p:nvSpPr>
@@ -15363,7 +15363,7 @@
       </p:sp>
       <p:sp>
         <p:nvSpPr>
-          <p:cNvPr id="7" name="Text 5"/>
+          <p:cNvPr id="8" name="Text 5"/>
           <p:cNvSpPr/>
           <p:nvPr/>
         </p:nvSpPr>
@@ -15402,7 +15402,7 @@
       </p:sp>
       <p:sp>
         <p:nvSpPr>
-          <p:cNvPr id="8" name="Text 6"/>
+          <p:cNvPr id="9" name="Text 6"/>
           <p:cNvSpPr/>
           <p:nvPr/>
         </p:nvSpPr>
@@ -15441,7 +15441,7 @@
       </p:sp>
       <p:sp>
         <p:nvSpPr>
-          <p:cNvPr id="9" name="Text 7"/>
+          <p:cNvPr id="10" name="Text 7"/>
           <p:cNvSpPr/>
           <p:nvPr/>
         </p:nvSpPr>
@@ -15480,7 +15480,7 @@
       </p:sp>
       <p:sp>
         <p:nvSpPr>
-          <p:cNvPr id="10" name="Shape 8"/>
+          <p:cNvPr id="11" name="Shape 8"/>
           <p:cNvSpPr/>
           <p:nvPr/>
         </p:nvSpPr>
@@ -15512,7 +15512,7 @@
       </p:sp>
       <p:sp>
         <p:nvSpPr>
-          <p:cNvPr id="11" name="Shape 9"/>
+          <p:cNvPr id="12" name="Shape 9"/>
           <p:cNvSpPr/>
           <p:nvPr/>
         </p:nvSpPr>
@@ -15532,7 +15532,7 @@
       </p:sp>
       <p:sp>
         <p:nvSpPr>
-          <p:cNvPr id="12" name="Text 10"/>
+          <p:cNvPr id="13" name="Text 10"/>
           <p:cNvSpPr/>
           <p:nvPr/>
         </p:nvSpPr>
@@ -15571,7 +15571,7 @@
       </p:sp>
       <p:sp>
         <p:nvSpPr>
-          <p:cNvPr id="13" name="Text 11"/>
+          <p:cNvPr id="14" name="Text 11"/>
           <p:cNvSpPr/>
           <p:nvPr/>
         </p:nvSpPr>
@@ -15610,7 +15610,7 @@
       </p:sp>
       <p:sp>
         <p:nvSpPr>
-          <p:cNvPr id="14" name="Text 12"/>
+          <p:cNvPr id="15" name="Text 12"/>
           <p:cNvSpPr/>
           <p:nvPr/>
         </p:nvSpPr>
@@ -15649,7 +15649,7 @@
       </p:sp>
       <p:sp>
         <p:nvSpPr>
-          <p:cNvPr id="15" name="Shape 13"/>
+          <p:cNvPr id="16" name="Shape 13"/>
           <p:cNvSpPr/>
           <p:nvPr/>
         </p:nvSpPr>
@@ -15681,7 +15681,7 @@
       </p:sp>
       <p:sp>
         <p:nvSpPr>
-          <p:cNvPr id="16" name="Shape 14"/>
+          <p:cNvPr id="17" name="Shape 14"/>
           <p:cNvSpPr/>
           <p:nvPr/>
         </p:nvSpPr>
@@ -15701,7 +15701,7 @@
       </p:sp>
       <p:sp>
         <p:nvSpPr>
-          <p:cNvPr id="17" name="Text 15"/>
+          <p:cNvPr id="18" name="Text 15"/>
           <p:cNvSpPr/>
           <p:nvPr/>
         </p:nvSpPr>
@@ -15740,7 +15740,7 @@
       </p:sp>
       <p:sp>
         <p:nvSpPr>
-          <p:cNvPr id="18" name="Text 16"/>
+          <p:cNvPr id="19" name="Text 16"/>
           <p:cNvSpPr/>
           <p:nvPr/>
         </p:nvSpPr>
@@ -15779,7 +15779,7 @@
       </p:sp>
       <p:sp>
         <p:nvSpPr>
-          <p:cNvPr id="19" name="Text 17"/>
+          <p:cNvPr id="20" name="Text 17"/>
           <p:cNvSpPr/>
           <p:nvPr/>
         </p:nvSpPr>
@@ -15818,7 +15818,7 @@
       </p:sp>
       <p:sp>
         <p:nvSpPr>
-          <p:cNvPr id="20" name="Shape 18"/>
+          <p:cNvPr id="21" name="Shape 18"/>
           <p:cNvSpPr/>
           <p:nvPr/>
         </p:nvSpPr>
@@ -15850,7 +15850,7 @@
       </p:sp>
       <p:sp>
         <p:nvSpPr>
-          <p:cNvPr id="21" name="Shape 19"/>
+          <p:cNvPr id="22" name="Shape 19"/>
           <p:cNvSpPr/>
           <p:nvPr/>
         </p:nvSpPr>
@@ -15870,7 +15870,7 @@
       </p:sp>
       <p:sp>
         <p:nvSpPr>
-          <p:cNvPr id="22" name="Text 20"/>
+          <p:cNvPr id="23" name="Text 20"/>
           <p:cNvSpPr/>
           <p:nvPr/>
         </p:nvSpPr>
@@ -15909,7 +15909,7 @@
       </p:sp>
       <p:sp>
         <p:nvSpPr>
-          <p:cNvPr id="23" name="Text 21"/>
+          <p:cNvPr id="24" name="Text 21"/>
           <p:cNvSpPr/>
           <p:nvPr/>
         </p:nvSpPr>
@@ -15948,7 +15948,7 @@
       </p:sp>
       <p:sp>
         <p:nvSpPr>
-          <p:cNvPr id="24" name="Text 22"/>
+          <p:cNvPr id="25" name="Text 22"/>
           <p:cNvSpPr/>
           <p:nvPr/>
         </p:nvSpPr>
@@ -15987,7 +15987,7 @@
       </p:sp>
       <p:sp>
         <p:nvSpPr>
-          <p:cNvPr id="25" name="Shape 23"/>
+          <p:cNvPr id="26" name="Shape 23"/>
           <p:cNvSpPr/>
           <p:nvPr/>
         </p:nvSpPr>
@@ -16019,7 +16019,7 @@
       </p:sp>
       <p:sp>
         <p:nvSpPr>
-          <p:cNvPr id="26" name="Shape 24"/>
+          <p:cNvPr id="27" name="Shape 24"/>
           <p:cNvSpPr/>
           <p:nvPr/>
         </p:nvSpPr>
@@ -16039,7 +16039,7 @@
       </p:sp>
       <p:sp>
         <p:nvSpPr>
-          <p:cNvPr id="27" name="Text 25"/>
+          <p:cNvPr id="28" name="Text 25"/>
           <p:cNvSpPr/>
           <p:nvPr/>
         </p:nvSpPr>
@@ -16078,7 +16078,7 @@
       </p:sp>
       <p:sp>
         <p:nvSpPr>
-          <p:cNvPr id="28" name="Text 26"/>
+          <p:cNvPr id="29" name="Text 26"/>
           <p:cNvSpPr/>
           <p:nvPr/>
         </p:nvSpPr>
@@ -16117,7 +16117,7 @@
       </p:sp>
       <p:sp>
         <p:nvSpPr>
-          <p:cNvPr id="29" name="Text 27"/>
+          <p:cNvPr id="30" name="Text 27"/>
           <p:cNvSpPr/>
           <p:nvPr/>
         </p:nvSpPr>
@@ -16156,7 +16156,7 @@
       </p:sp>
       <p:sp>
         <p:nvSpPr>
-          <p:cNvPr id="30" name="Shape 28"/>
+          <p:cNvPr id="31" name="Shape 28"/>
           <p:cNvSpPr/>
           <p:nvPr/>
         </p:nvSpPr>
@@ -16188,7 +16188,7 @@
       </p:sp>
       <p:sp>
         <p:nvSpPr>
-          <p:cNvPr id="31" name="Shape 29"/>
+          <p:cNvPr id="32" name="Shape 29"/>
           <p:cNvSpPr/>
           <p:nvPr/>
         </p:nvSpPr>
@@ -16208,7 +16208,7 @@
       </p:sp>
       <p:sp>
         <p:nvSpPr>
-          <p:cNvPr id="32" name="Text 30"/>
+          <p:cNvPr id="33" name="Text 30"/>
           <p:cNvSpPr/>
           <p:nvPr/>
         </p:nvSpPr>
@@ -16247,7 +16247,7 @@
       </p:sp>
       <p:sp>
         <p:nvSpPr>
-          <p:cNvPr id="33" name="Text 31"/>
+          <p:cNvPr id="34" name="Text 31"/>
           <p:cNvSpPr/>
           <p:nvPr/>
         </p:nvSpPr>
@@ -16286,7 +16286,7 @@
       </p:sp>
       <p:sp>
         <p:nvSpPr>
-          <p:cNvPr id="34" name="Text 32"/>
+          <p:cNvPr id="35" name="Text 32"/>
           <p:cNvSpPr/>
           <p:nvPr/>
         </p:nvSpPr>
@@ -16325,7 +16325,7 @@
       </p:sp>
       <p:sp>
         <p:nvSpPr>
-          <p:cNvPr id="35" name="Text 33"/>
+          <p:cNvPr id="36" name="Text 33"/>
           <p:cNvSpPr/>
           <p:nvPr/>
         </p:nvSpPr>
@@ -16378,7 +16378,7 @@
       </p:sp>
       <p:sp>
         <p:nvSpPr>
-          <p:cNvPr id="36" name="Text 34"/>
+          <p:cNvPr id="37" name="Text 34"/>
           <p:cNvSpPr/>
           <p:nvPr/>
         </p:nvSpPr>
@@ -16463,7 +16463,7 @@
       </p:grpSpPr>
       <p:sp>
         <p:nvSpPr>
-          <p:cNvPr id="2" name="Shape 0"/>
+          <p:cNvPr id="3" name="Shape 0"/>
           <p:cNvSpPr/>
           <p:nvPr/>
         </p:nvSpPr>
@@ -16483,7 +16483,7 @@
       </p:sp>
       <p:sp>
         <p:nvSpPr>
-          <p:cNvPr id="3" name="Text 1"/>
+          <p:cNvPr id="4" name="Text 1"/>
           <p:cNvSpPr/>
           <p:nvPr/>
         </p:nvSpPr>
@@ -16522,7 +16522,7 @@
       </p:sp>
       <p:sp>
         <p:nvSpPr>
-          <p:cNvPr id="4" name="Text 2"/>
+          <p:cNvPr id="5" name="Text 2"/>
           <p:cNvSpPr/>
           <p:nvPr/>
         </p:nvSpPr>
@@ -16561,7 +16561,7 @@
       </p:sp>
       <p:sp>
         <p:nvSpPr>
-          <p:cNvPr id="5" name="Shape 3"/>
+          <p:cNvPr id="6" name="Shape 3"/>
           <p:cNvSpPr/>
           <p:nvPr/>
         </p:nvSpPr>
@@ -16593,7 +16593,7 @@
       </p:sp>
       <p:sp>
         <p:nvSpPr>
-          <p:cNvPr id="6" name="Shape 4"/>
+          <p:cNvPr id="7" name="Shape 4"/>
           <p:cNvSpPr/>
           <p:nvPr/>
         </p:nvSpPr>
@@ -16613,7 +16613,7 @@
       </p:sp>
       <p:sp>
         <p:nvSpPr>
-          <p:cNvPr id="7" name="Text 5"/>
+          <p:cNvPr id="8" name="Text 5"/>
           <p:cNvSpPr/>
           <p:nvPr/>
         </p:nvSpPr>
@@ -16652,7 +16652,7 @@
       </p:sp>
       <p:sp>
         <p:nvSpPr>
-          <p:cNvPr id="8" name="Text 6"/>
+          <p:cNvPr id="9" name="Text 6"/>
           <p:cNvSpPr/>
           <p:nvPr/>
         </p:nvSpPr>
@@ -16691,7 +16691,7 @@
       </p:sp>
       <p:sp>
         <p:nvSpPr>
-          <p:cNvPr id="9" name="Text 7"/>
+          <p:cNvPr id="10" name="Text 7"/>
           <p:cNvSpPr/>
           <p:nvPr/>
         </p:nvSpPr>
@@ -16753,7 +16753,7 @@
       </p:sp>
       <p:sp>
         <p:nvSpPr>
-          <p:cNvPr id="10" name="Shape 8"/>
+          <p:cNvPr id="11" name="Shape 8"/>
           <p:cNvSpPr/>
           <p:nvPr/>
         </p:nvSpPr>
@@ -16785,7 +16785,7 @@
       </p:sp>
       <p:sp>
         <p:nvSpPr>
-          <p:cNvPr id="11" name="Shape 9"/>
+          <p:cNvPr id="12" name="Shape 9"/>
           <p:cNvSpPr/>
           <p:nvPr/>
         </p:nvSpPr>
@@ -16805,7 +16805,7 @@
       </p:sp>
       <p:sp>
         <p:nvSpPr>
-          <p:cNvPr id="12" name="Text 10"/>
+          <p:cNvPr id="13" name="Text 10"/>
           <p:cNvSpPr/>
           <p:nvPr/>
         </p:nvSpPr>
@@ -16844,7 +16844,7 @@
       </p:sp>
       <p:sp>
         <p:nvSpPr>
-          <p:cNvPr id="13" name="Text 11"/>
+          <p:cNvPr id="14" name="Text 11"/>
           <p:cNvSpPr/>
           <p:nvPr/>
         </p:nvSpPr>
@@ -16883,7 +16883,7 @@
       </p:sp>
       <p:sp>
         <p:nvSpPr>
-          <p:cNvPr id="14" name="Text 12"/>
+          <p:cNvPr id="15" name="Text 12"/>
           <p:cNvSpPr/>
           <p:nvPr/>
         </p:nvSpPr>
@@ -16945,7 +16945,7 @@
       </p:sp>
       <p:sp>
         <p:nvSpPr>
-          <p:cNvPr id="15" name="Shape 13"/>
+          <p:cNvPr id="16" name="Shape 13"/>
           <p:cNvSpPr/>
           <p:nvPr/>
         </p:nvSpPr>
@@ -16977,7 +16977,7 @@
       </p:sp>
       <p:sp>
         <p:nvSpPr>
-          <p:cNvPr id="16" name="Shape 14"/>
+          <p:cNvPr id="17" name="Shape 14"/>
           <p:cNvSpPr/>
           <p:nvPr/>
         </p:nvSpPr>
@@ -16997,7 +16997,7 @@
       </p:sp>
       <p:sp>
         <p:nvSpPr>
-          <p:cNvPr id="17" name="Text 15"/>
+          <p:cNvPr id="18" name="Text 15"/>
           <p:cNvSpPr/>
           <p:nvPr/>
         </p:nvSpPr>
@@ -17036,7 +17036,7 @@
       </p:sp>
       <p:sp>
         <p:nvSpPr>
-          <p:cNvPr id="18" name="Text 16"/>
+          <p:cNvPr id="19" name="Text 16"/>
           <p:cNvSpPr/>
           <p:nvPr/>
         </p:nvSpPr>
@@ -17075,7 +17075,7 @@
       </p:sp>
       <p:sp>
         <p:nvSpPr>
-          <p:cNvPr id="19" name="Text 17"/>
+          <p:cNvPr id="20" name="Text 17"/>
           <p:cNvSpPr/>
           <p:nvPr/>
         </p:nvSpPr>
@@ -17137,7 +17137,7 @@
       </p:sp>
       <p:sp>
         <p:nvSpPr>
-          <p:cNvPr id="20" name="Text 18"/>
+          <p:cNvPr id="21" name="Text 18"/>
           <p:cNvSpPr/>
           <p:nvPr/>
         </p:nvSpPr>
@@ -17176,7 +17176,7 @@
       </p:sp>
       <p:sp>
         <p:nvSpPr>
-          <p:cNvPr id="21" name="Text 19"/>
+          <p:cNvPr id="22" name="Text 19"/>
           <p:cNvSpPr/>
           <p:nvPr/>
         </p:nvSpPr>
@@ -17352,7 +17352,7 @@
       </p:grpSpPr>
       <p:sp>
         <p:nvSpPr>
-          <p:cNvPr id="2" name="Shape 0"/>
+          <p:cNvPr id="3" name="Shape 0"/>
           <p:cNvSpPr/>
           <p:nvPr/>
         </p:nvSpPr>
@@ -17372,7 +17372,7 @@
       </p:sp>
       <p:sp>
         <p:nvSpPr>
-          <p:cNvPr id="3" name="Text 1"/>
+          <p:cNvPr id="4" name="Text 1"/>
           <p:cNvSpPr/>
           <p:nvPr/>
         </p:nvSpPr>
@@ -17411,7 +17411,7 @@
       </p:sp>
       <p:sp>
         <p:nvSpPr>
-          <p:cNvPr id="4" name="Text 2"/>
+          <p:cNvPr id="5" name="Text 2"/>
           <p:cNvSpPr/>
           <p:nvPr/>
         </p:nvSpPr>
@@ -17450,7 +17450,7 @@
       </p:sp>
       <p:sp>
         <p:nvSpPr>
-          <p:cNvPr id="5" name="Shape 3"/>
+          <p:cNvPr id="6" name="Shape 3"/>
           <p:cNvSpPr/>
           <p:nvPr/>
         </p:nvSpPr>
@@ -17482,7 +17482,7 @@
       </p:sp>
       <p:sp>
         <p:nvSpPr>
-          <p:cNvPr id="6" name="Shape 4"/>
+          <p:cNvPr id="7" name="Shape 4"/>
           <p:cNvSpPr/>
           <p:nvPr/>
         </p:nvSpPr>
@@ -17502,7 +17502,7 @@
       </p:sp>
       <p:sp>
         <p:nvSpPr>
-          <p:cNvPr id="7" name="Text 5"/>
+          <p:cNvPr id="8" name="Text 5"/>
           <p:cNvSpPr/>
           <p:nvPr/>
         </p:nvSpPr>
@@ -17541,7 +17541,7 @@
       </p:sp>
       <p:sp>
         <p:nvSpPr>
-          <p:cNvPr id="8" name="Text 6"/>
+          <p:cNvPr id="9" name="Text 6"/>
           <p:cNvSpPr/>
           <p:nvPr/>
         </p:nvSpPr>
@@ -17580,7 +17580,7 @@
       </p:sp>
       <p:sp>
         <p:nvSpPr>
-          <p:cNvPr id="9" name="Text 7"/>
+          <p:cNvPr id="10" name="Text 7"/>
           <p:cNvSpPr/>
           <p:nvPr/>
         </p:nvSpPr>
@@ -17619,7 +17619,7 @@
       </p:sp>
       <p:sp>
         <p:nvSpPr>
-          <p:cNvPr id="10" name="Shape 8"/>
+          <p:cNvPr id="11" name="Shape 8"/>
           <p:cNvSpPr/>
           <p:nvPr/>
         </p:nvSpPr>
@@ -17651,7 +17651,7 @@
       </p:sp>
       <p:sp>
         <p:nvSpPr>
-          <p:cNvPr id="11" name="Shape 9"/>
+          <p:cNvPr id="12" name="Shape 9"/>
           <p:cNvSpPr/>
           <p:nvPr/>
         </p:nvSpPr>
@@ -17671,7 +17671,7 @@
       </p:sp>
       <p:sp>
         <p:nvSpPr>
-          <p:cNvPr id="12" name="Text 10"/>
+          <p:cNvPr id="13" name="Text 10"/>
           <p:cNvSpPr/>
           <p:nvPr/>
         </p:nvSpPr>
@@ -17710,7 +17710,7 @@
       </p:sp>
       <p:sp>
         <p:nvSpPr>
-          <p:cNvPr id="13" name="Text 11"/>
+          <p:cNvPr id="14" name="Text 11"/>
           <p:cNvSpPr/>
           <p:nvPr/>
         </p:nvSpPr>
@@ -17749,7 +17749,7 @@
       </p:sp>
       <p:sp>
         <p:nvSpPr>
-          <p:cNvPr id="14" name="Text 12"/>
+          <p:cNvPr id="15" name="Text 12"/>
           <p:cNvSpPr/>
           <p:nvPr/>
         </p:nvSpPr>
@@ -17788,7 +17788,7 @@
       </p:sp>
       <p:sp>
         <p:nvSpPr>
-          <p:cNvPr id="15" name="Shape 13"/>
+          <p:cNvPr id="16" name="Shape 13"/>
           <p:cNvSpPr/>
           <p:nvPr/>
         </p:nvSpPr>
@@ -17820,7 +17820,7 @@
       </p:sp>
       <p:sp>
         <p:nvSpPr>
-          <p:cNvPr id="16" name="Shape 14"/>
+          <p:cNvPr id="17" name="Shape 14"/>
           <p:cNvSpPr/>
           <p:nvPr/>
         </p:nvSpPr>
@@ -17840,7 +17840,7 @@
       </p:sp>
       <p:sp>
         <p:nvSpPr>
-          <p:cNvPr id="17" name="Text 15"/>
+          <p:cNvPr id="18" name="Text 15"/>
           <p:cNvSpPr/>
           <p:nvPr/>
         </p:nvSpPr>
@@ -17879,7 +17879,7 @@
       </p:sp>
       <p:sp>
         <p:nvSpPr>
-          <p:cNvPr id="18" name="Text 16"/>
+          <p:cNvPr id="19" name="Text 16"/>
           <p:cNvSpPr/>
           <p:nvPr/>
         </p:nvSpPr>
@@ -17918,7 +17918,7 @@
       </p:sp>
       <p:sp>
         <p:nvSpPr>
-          <p:cNvPr id="19" name="Text 17"/>
+          <p:cNvPr id="20" name="Text 17"/>
           <p:cNvSpPr/>
           <p:nvPr/>
         </p:nvSpPr>
@@ -17957,7 +17957,7 @@
       </p:sp>
       <p:sp>
         <p:nvSpPr>
-          <p:cNvPr id="20" name="Text 18"/>
+          <p:cNvPr id="21" name="Text 18"/>
           <p:cNvSpPr/>
           <p:nvPr/>
         </p:nvSpPr>
@@ -17996,7 +17996,7 @@
       </p:sp>
       <p:sp>
         <p:nvSpPr>
-          <p:cNvPr id="21" name="Text 19"/>
+          <p:cNvPr id="22" name="Text 19"/>
           <p:cNvSpPr/>
           <p:nvPr/>
         </p:nvSpPr>
@@ -18116,7 +18116,7 @@
       </p:grpSpPr>
       <p:sp>
         <p:nvSpPr>
-          <p:cNvPr id="2" name="Shape 0"/>
+          <p:cNvPr id="3" name="Shape 0"/>
           <p:cNvSpPr/>
           <p:nvPr/>
         </p:nvSpPr>
@@ -18136,7 +18136,7 @@
       </p:sp>
       <p:sp>
         <p:nvSpPr>
-          <p:cNvPr id="3" name="Text 1"/>
+          <p:cNvPr id="4" name="Text 1"/>
           <p:cNvSpPr/>
           <p:nvPr/>
         </p:nvSpPr>
@@ -18175,7 +18175,7 @@
       </p:sp>
       <p:sp>
         <p:nvSpPr>
-          <p:cNvPr id="4" name="Text 2"/>
+          <p:cNvPr id="5" name="Text 2"/>
           <p:cNvSpPr/>
           <p:nvPr/>
         </p:nvSpPr>
@@ -18214,7 +18214,7 @@
       </p:sp>
       <p:sp>
         <p:nvSpPr>
-          <p:cNvPr id="5" name="Shape 3"/>
+          <p:cNvPr id="6" name="Shape 3"/>
           <p:cNvSpPr/>
           <p:nvPr/>
         </p:nvSpPr>
@@ -18246,7 +18246,7 @@
       </p:sp>
       <p:sp>
         <p:nvSpPr>
-          <p:cNvPr id="6" name="Shape 4"/>
+          <p:cNvPr id="7" name="Shape 4"/>
           <p:cNvSpPr/>
           <p:nvPr/>
         </p:nvSpPr>
@@ -18266,7 +18266,7 @@
       </p:sp>
       <p:sp>
         <p:nvSpPr>
-          <p:cNvPr id="7" name="Text 5"/>
+          <p:cNvPr id="8" name="Text 5"/>
           <p:cNvSpPr/>
           <p:nvPr/>
         </p:nvSpPr>
@@ -18305,7 +18305,7 @@
       </p:sp>
       <p:sp>
         <p:nvSpPr>
-          <p:cNvPr id="8" name="Text 6"/>
+          <p:cNvPr id="9" name="Text 6"/>
           <p:cNvSpPr/>
           <p:nvPr/>
         </p:nvSpPr>
@@ -18367,7 +18367,7 @@
       </p:sp>
       <p:sp>
         <p:nvSpPr>
-          <p:cNvPr id="9" name="Shape 7"/>
+          <p:cNvPr id="10" name="Shape 7"/>
           <p:cNvSpPr/>
           <p:nvPr/>
         </p:nvSpPr>
@@ -18399,7 +18399,7 @@
       </p:sp>
       <p:sp>
         <p:nvSpPr>
-          <p:cNvPr id="10" name="Shape 8"/>
+          <p:cNvPr id="11" name="Shape 8"/>
           <p:cNvSpPr/>
           <p:nvPr/>
         </p:nvSpPr>
@@ -18419,7 +18419,7 @@
       </p:sp>
       <p:sp>
         <p:nvSpPr>
-          <p:cNvPr id="11" name="Text 9"/>
+          <p:cNvPr id="12" name="Text 9"/>
           <p:cNvSpPr/>
           <p:nvPr/>
         </p:nvSpPr>
@@ -18458,7 +18458,7 @@
       </p:sp>
       <p:sp>
         <p:nvSpPr>
-          <p:cNvPr id="12" name="Text 10"/>
+          <p:cNvPr id="13" name="Text 10"/>
           <p:cNvSpPr/>
           <p:nvPr/>
         </p:nvSpPr>
@@ -18520,7 +18520,7 @@
       </p:sp>
       <p:sp>
         <p:nvSpPr>
-          <p:cNvPr id="13" name="Shape 11"/>
+          <p:cNvPr id="14" name="Shape 11"/>
           <p:cNvSpPr/>
           <p:nvPr/>
         </p:nvSpPr>
@@ -18552,7 +18552,7 @@
       </p:sp>
       <p:sp>
         <p:nvSpPr>
-          <p:cNvPr id="14" name="Text 12"/>
+          <p:cNvPr id="15" name="Text 12"/>
           <p:cNvSpPr/>
           <p:nvPr/>
         </p:nvSpPr>
@@ -18591,7 +18591,7 @@
       </p:sp>
       <p:sp>
         <p:nvSpPr>
-          <p:cNvPr id="15" name="Text 13"/>
+          <p:cNvPr id="16" name="Text 13"/>
           <p:cNvSpPr/>
           <p:nvPr/>
         </p:nvSpPr>
@@ -18630,7 +18630,7 @@
       </p:sp>
       <p:sp>
         <p:nvSpPr>
-          <p:cNvPr id="16" name="Text 14"/>
+          <p:cNvPr id="17" name="Text 14"/>
           <p:cNvSpPr/>
           <p:nvPr/>
         </p:nvSpPr>
@@ -18669,7 +18669,7 @@
       </p:sp>
       <p:sp>
         <p:nvSpPr>
-          <p:cNvPr id="17" name="Shape 15"/>
+          <p:cNvPr id="18" name="Shape 15"/>
           <p:cNvSpPr/>
           <p:nvPr/>
         </p:nvSpPr>
@@ -18701,7 +18701,7 @@
       </p:sp>
       <p:sp>
         <p:nvSpPr>
-          <p:cNvPr id="18" name="Text 16"/>
+          <p:cNvPr id="19" name="Text 16"/>
           <p:cNvSpPr/>
           <p:nvPr/>
         </p:nvSpPr>
@@ -18740,7 +18740,7 @@
       </p:sp>
       <p:sp>
         <p:nvSpPr>
-          <p:cNvPr id="19" name="Text 17"/>
+          <p:cNvPr id="20" name="Text 17"/>
           <p:cNvSpPr/>
           <p:nvPr/>
         </p:nvSpPr>
@@ -18779,7 +18779,7 @@
       </p:sp>
       <p:sp>
         <p:nvSpPr>
-          <p:cNvPr id="20" name="Text 18"/>
+          <p:cNvPr id="21" name="Text 18"/>
           <p:cNvSpPr/>
           <p:nvPr/>
         </p:nvSpPr>
@@ -18818,7 +18818,7 @@
       </p:sp>
       <p:sp>
         <p:nvSpPr>
-          <p:cNvPr id="21" name="Shape 19"/>
+          <p:cNvPr id="22" name="Shape 19"/>
           <p:cNvSpPr/>
           <p:nvPr/>
         </p:nvSpPr>
@@ -18850,7 +18850,7 @@
       </p:sp>
       <p:sp>
         <p:nvSpPr>
-          <p:cNvPr id="22" name="Text 20"/>
+          <p:cNvPr id="23" name="Text 20"/>
           <p:cNvSpPr/>
           <p:nvPr/>
         </p:nvSpPr>
@@ -18889,7 +18889,7 @@
       </p:sp>
       <p:sp>
         <p:nvSpPr>
-          <p:cNvPr id="23" name="Text 21"/>
+          <p:cNvPr id="24" name="Text 21"/>
           <p:cNvSpPr/>
           <p:nvPr/>
         </p:nvSpPr>
@@ -18928,7 +18928,7 @@
       </p:sp>
       <p:sp>
         <p:nvSpPr>
-          <p:cNvPr id="24" name="Text 22"/>
+          <p:cNvPr id="25" name="Text 22"/>
           <p:cNvSpPr/>
           <p:nvPr/>
         </p:nvSpPr>
@@ -18967,7 +18967,7 @@
       </p:sp>
       <p:sp>
         <p:nvSpPr>
-          <p:cNvPr id="25" name="Text 23"/>
+          <p:cNvPr id="26" name="Text 23"/>
           <p:cNvSpPr/>
           <p:nvPr/>
         </p:nvSpPr>
@@ -19006,7 +19006,7 @@
       </p:sp>
       <p:sp>
         <p:nvSpPr>
-          <p:cNvPr id="26" name="Text 24"/>
+          <p:cNvPr id="27" name="Text 24"/>
           <p:cNvSpPr/>
           <p:nvPr/>
         </p:nvSpPr>
@@ -19161,7 +19161,7 @@
       </p:grpSpPr>
       <p:sp>
         <p:nvSpPr>
-          <p:cNvPr id="2" name="Shape 0"/>
+          <p:cNvPr id="3" name="Shape 0"/>
           <p:cNvSpPr/>
           <p:nvPr/>
         </p:nvSpPr>
@@ -19181,7 +19181,7 @@
       </p:sp>
       <p:sp>
         <p:nvSpPr>
-          <p:cNvPr id="3" name="Text 1"/>
+          <p:cNvPr id="4" name="Text 1"/>
           <p:cNvSpPr/>
           <p:nvPr/>
         </p:nvSpPr>
@@ -19220,7 +19220,7 @@
       </p:sp>
       <p:sp>
         <p:nvSpPr>
-          <p:cNvPr id="4" name="Text 2"/>
+          <p:cNvPr id="5" name="Text 2"/>
           <p:cNvSpPr/>
           <p:nvPr/>
         </p:nvSpPr>
@@ -20114,7 +20114,7 @@
       </p:graphicFrame>
       <p:sp>
         <p:nvSpPr>
-          <p:cNvPr id="6" name="Shape 3"/>
+          <p:cNvPr id="7" name="Shape 3"/>
           <p:cNvSpPr/>
           <p:nvPr/>
         </p:nvSpPr>
@@ -20146,7 +20146,7 @@
       </p:sp>
       <p:sp>
         <p:nvSpPr>
-          <p:cNvPr id="7" name="Text 4"/>
+          <p:cNvPr id="8" name="Text 4"/>
           <p:cNvSpPr/>
           <p:nvPr/>
         </p:nvSpPr>
@@ -20185,7 +20185,7 @@
       </p:sp>
       <p:sp>
         <p:nvSpPr>
-          <p:cNvPr id="8" name="Text 5"/>
+          <p:cNvPr id="9" name="Text 5"/>
           <p:cNvSpPr/>
           <p:nvPr/>
         </p:nvSpPr>
@@ -20340,7 +20340,7 @@
       </p:grpSpPr>
       <p:sp>
         <p:nvSpPr>
-          <p:cNvPr id="2" name="Shape 0"/>
+          <p:cNvPr id="3" name="Shape 0"/>
           <p:cNvSpPr/>
           <p:nvPr/>
         </p:nvSpPr>
@@ -20360,7 +20360,7 @@
       </p:sp>
       <p:sp>
         <p:nvSpPr>
-          <p:cNvPr id="3" name="Text 1"/>
+          <p:cNvPr id="4" name="Text 1"/>
           <p:cNvSpPr/>
           <p:nvPr/>
         </p:nvSpPr>
@@ -20399,7 +20399,7 @@
       </p:sp>
       <p:sp>
         <p:nvSpPr>
-          <p:cNvPr id="4" name="Text 2"/>
+          <p:cNvPr id="5" name="Text 2"/>
           <p:cNvSpPr/>
           <p:nvPr/>
         </p:nvSpPr>
@@ -20438,7 +20438,7 @@
       </p:sp>
       <p:sp>
         <p:nvSpPr>
-          <p:cNvPr id="5" name="Shape 3"/>
+          <p:cNvPr id="6" name="Shape 3"/>
           <p:cNvSpPr/>
           <p:nvPr/>
         </p:nvSpPr>
@@ -20470,7 +20470,7 @@
       </p:sp>
       <p:sp>
         <p:nvSpPr>
-          <p:cNvPr id="6" name="Shape 4"/>
+          <p:cNvPr id="7" name="Shape 4"/>
           <p:cNvSpPr/>
           <p:nvPr/>
         </p:nvSpPr>
@@ -20490,7 +20490,7 @@
       </p:sp>
       <p:sp>
         <p:nvSpPr>
-          <p:cNvPr id="7" name="Text 5"/>
+          <p:cNvPr id="8" name="Text 5"/>
           <p:cNvSpPr/>
           <p:nvPr/>
         </p:nvSpPr>
@@ -20529,7 +20529,7 @@
       </p:sp>
       <p:sp>
         <p:nvSpPr>
-          <p:cNvPr id="8" name="Shape 6"/>
+          <p:cNvPr id="9" name="Shape 6"/>
           <p:cNvSpPr/>
           <p:nvPr/>
         </p:nvSpPr>
@@ -20561,7 +20561,7 @@
       </p:sp>
       <p:sp>
         <p:nvSpPr>
-          <p:cNvPr id="9" name="Shape 7"/>
+          <p:cNvPr id="10" name="Shape 7"/>
           <p:cNvSpPr/>
           <p:nvPr/>
         </p:nvSpPr>
@@ -20581,7 +20581,7 @@
       </p:sp>
       <p:sp>
         <p:nvSpPr>
-          <p:cNvPr id="10" name="Text 8"/>
+          <p:cNvPr id="11" name="Text 8"/>
           <p:cNvSpPr/>
           <p:nvPr/>
         </p:nvSpPr>
@@ -20620,7 +20620,7 @@
       </p:sp>
       <p:sp>
         <p:nvSpPr>
-          <p:cNvPr id="11" name="Shape 9"/>
+          <p:cNvPr id="12" name="Shape 9"/>
           <p:cNvSpPr/>
           <p:nvPr/>
         </p:nvSpPr>
@@ -20652,7 +20652,7 @@
       </p:sp>
       <p:sp>
         <p:nvSpPr>
-          <p:cNvPr id="12" name="Shape 10"/>
+          <p:cNvPr id="13" name="Shape 10"/>
           <p:cNvSpPr/>
           <p:nvPr/>
         </p:nvSpPr>
@@ -20672,7 +20672,7 @@
       </p:sp>
       <p:sp>
         <p:nvSpPr>
-          <p:cNvPr id="13" name="Text 11"/>
+          <p:cNvPr id="14" name="Text 11"/>
           <p:cNvSpPr/>
           <p:nvPr/>
         </p:nvSpPr>
@@ -20711,7 +20711,7 @@
       </p:sp>
       <p:sp>
         <p:nvSpPr>
-          <p:cNvPr id="14" name="Shape 12"/>
+          <p:cNvPr id="15" name="Shape 12"/>
           <p:cNvSpPr/>
           <p:nvPr/>
         </p:nvSpPr>
@@ -20743,7 +20743,7 @@
       </p:sp>
       <p:sp>
         <p:nvSpPr>
-          <p:cNvPr id="15" name="Shape 13"/>
+          <p:cNvPr id="16" name="Shape 13"/>
           <p:cNvSpPr/>
           <p:nvPr/>
         </p:nvSpPr>
@@ -20763,7 +20763,7 @@
       </p:sp>
       <p:sp>
         <p:nvSpPr>
-          <p:cNvPr id="16" name="Text 14"/>
+          <p:cNvPr id="17" name="Text 14"/>
           <p:cNvSpPr/>
           <p:nvPr/>
         </p:nvSpPr>
@@ -20802,7 +20802,7 @@
       </p:sp>
       <p:sp>
         <p:nvSpPr>
-          <p:cNvPr id="17" name="Shape 15"/>
+          <p:cNvPr id="18" name="Shape 15"/>
           <p:cNvSpPr/>
           <p:nvPr/>
         </p:nvSpPr>
@@ -20834,7 +20834,7 @@
       </p:sp>
       <p:sp>
         <p:nvSpPr>
-          <p:cNvPr id="18" name="Shape 16"/>
+          <p:cNvPr id="19" name="Shape 16"/>
           <p:cNvSpPr/>
           <p:nvPr/>
         </p:nvSpPr>
@@ -20854,7 +20854,7 @@
       </p:sp>
       <p:sp>
         <p:nvSpPr>
-          <p:cNvPr id="19" name="Text 17"/>
+          <p:cNvPr id="20" name="Text 17"/>
           <p:cNvSpPr/>
           <p:nvPr/>
         </p:nvSpPr>
@@ -20893,7 +20893,7 @@
       </p:sp>
       <p:sp>
         <p:nvSpPr>
-          <p:cNvPr id="20" name="Text 18"/>
+          <p:cNvPr id="21" name="Text 18"/>
           <p:cNvSpPr/>
           <p:nvPr/>
         </p:nvSpPr>
@@ -20932,7 +20932,7 @@
       </p:sp>
       <p:sp>
         <p:nvSpPr>
-          <p:cNvPr id="21" name="Text 19"/>
+          <p:cNvPr id="22" name="Text 19"/>
           <p:cNvSpPr/>
           <p:nvPr/>
         </p:nvSpPr>
@@ -20971,7 +20971,7 @@
       </p:sp>
       <p:sp>
         <p:nvSpPr>
-          <p:cNvPr id="22" name="Text 20"/>
+          <p:cNvPr id="23" name="Text 20"/>
           <p:cNvSpPr/>
           <p:nvPr/>
         </p:nvSpPr>
@@ -21056,7 +21056,7 @@
       </p:grpSpPr>
       <p:sp>
         <p:nvSpPr>
-          <p:cNvPr id="2" name="Shape 0"/>
+          <p:cNvPr id="3" name="Shape 0"/>
           <p:cNvSpPr/>
           <p:nvPr/>
         </p:nvSpPr>
@@ -21076,7 +21076,7 @@
       </p:sp>
       <p:sp>
         <p:nvSpPr>
-          <p:cNvPr id="3" name="Text 1"/>
+          <p:cNvPr id="4" name="Text 1"/>
           <p:cNvSpPr/>
           <p:nvPr/>
         </p:nvSpPr>
@@ -21115,7 +21115,7 @@
       </p:sp>
       <p:sp>
         <p:nvSpPr>
-          <p:cNvPr id="4" name="Text 2"/>
+          <p:cNvPr id="5" name="Text 2"/>
           <p:cNvSpPr/>
           <p:nvPr/>
         </p:nvSpPr>
@@ -21177,7 +21177,7 @@
       </p:sp>
       <p:sp>
         <p:nvSpPr>
-          <p:cNvPr id="5" name="Text 3"/>
+          <p:cNvPr id="6" name="Text 3"/>
           <p:cNvSpPr/>
           <p:nvPr/>
         </p:nvSpPr>
@@ -21216,7 +21216,7 @@
       </p:sp>
       <p:sp>
         <p:nvSpPr>
-          <p:cNvPr id="6" name="Text 4"/>
+          <p:cNvPr id="7" name="Text 4"/>
           <p:cNvSpPr/>
           <p:nvPr/>
         </p:nvSpPr>
